--- a/第一週_1.課堂規定及評量標準.pptx
+++ b/第一週_1.課堂規定及評量標準.pptx
@@ -9,14 +9,14 @@
   </p:notesMasterIdLst>
   <p:sldIdLst>
     <p:sldId id="256" r:id="rId2"/>
-    <p:sldId id="270" r:id="rId3"/>
-    <p:sldId id="261" r:id="rId4"/>
+    <p:sldId id="261" r:id="rId3"/>
+    <p:sldId id="270" r:id="rId4"/>
     <p:sldId id="271" r:id="rId5"/>
     <p:sldId id="277" r:id="rId6"/>
     <p:sldId id="272" r:id="rId7"/>
-    <p:sldId id="275" r:id="rId8"/>
-    <p:sldId id="276" r:id="rId9"/>
-    <p:sldId id="278" r:id="rId10"/>
+    <p:sldId id="278" r:id="rId8"/>
+    <p:sldId id="275" r:id="rId9"/>
+    <p:sldId id="276" r:id="rId10"/>
   </p:sldIdLst>
   <p:sldSz cx="12192000" cy="6858000"/>
   <p:notesSz cx="6858000" cy="9144000"/>
@@ -205,7 +205,7 @@
           <a:p>
             <a:fld id="{31A8676C-D457-4A0B-9C91-83939419494E}" type="datetimeFigureOut">
               <a:rPr lang="zh-TW" altLang="en-US" smtClean="0"/>
-              <a:t>2025/9/1</a:t>
+              <a:t>2025/9/9</a:t>
             </a:fld>
             <a:endParaRPr lang="zh-TW" altLang="en-US"/>
           </a:p>
@@ -510,7 +510,7 @@
             <a:fld id="{5042F59D-1976-4030-A7B5-0D54ABB5D05B}" type="slidenum">
               <a:rPr lang="en-US" altLang="zh-TW"/>
               <a:pPr/>
-              <a:t>2</a:t>
+              <a:t>3</a:t>
             </a:fld>
             <a:endParaRPr lang="en-US" altLang="zh-TW"/>
           </a:p>
@@ -693,7 +693,7 @@
           <a:p>
             <a:fld id="{6930F9A4-4469-4216-8732-74830AAB3356}" type="datetimeFigureOut">
               <a:rPr lang="zh-TW" altLang="en-US" smtClean="0"/>
-              <a:t>2025/9/1</a:t>
+              <a:t>2025/9/9</a:t>
             </a:fld>
             <a:endParaRPr lang="zh-TW" altLang="en-US"/>
           </a:p>
@@ -863,7 +863,7 @@
           <a:p>
             <a:fld id="{6930F9A4-4469-4216-8732-74830AAB3356}" type="datetimeFigureOut">
               <a:rPr lang="zh-TW" altLang="en-US" smtClean="0"/>
-              <a:t>2025/9/1</a:t>
+              <a:t>2025/9/9</a:t>
             </a:fld>
             <a:endParaRPr lang="zh-TW" altLang="en-US"/>
           </a:p>
@@ -1043,7 +1043,7 @@
           <a:p>
             <a:fld id="{6930F9A4-4469-4216-8732-74830AAB3356}" type="datetimeFigureOut">
               <a:rPr lang="zh-TW" altLang="en-US" smtClean="0"/>
-              <a:t>2025/9/1</a:t>
+              <a:t>2025/9/9</a:t>
             </a:fld>
             <a:endParaRPr lang="zh-TW" altLang="en-US"/>
           </a:p>
@@ -1213,7 +1213,7 @@
           <a:p>
             <a:fld id="{6930F9A4-4469-4216-8732-74830AAB3356}" type="datetimeFigureOut">
               <a:rPr lang="zh-TW" altLang="en-US" smtClean="0"/>
-              <a:t>2025/9/1</a:t>
+              <a:t>2025/9/9</a:t>
             </a:fld>
             <a:endParaRPr lang="zh-TW" altLang="en-US"/>
           </a:p>
@@ -1459,7 +1459,7 @@
           <a:p>
             <a:fld id="{6930F9A4-4469-4216-8732-74830AAB3356}" type="datetimeFigureOut">
               <a:rPr lang="zh-TW" altLang="en-US" smtClean="0"/>
-              <a:t>2025/9/1</a:t>
+              <a:t>2025/9/9</a:t>
             </a:fld>
             <a:endParaRPr lang="zh-TW" altLang="en-US"/>
           </a:p>
@@ -1691,7 +1691,7 @@
           <a:p>
             <a:fld id="{6930F9A4-4469-4216-8732-74830AAB3356}" type="datetimeFigureOut">
               <a:rPr lang="zh-TW" altLang="en-US" smtClean="0"/>
-              <a:t>2025/9/1</a:t>
+              <a:t>2025/9/9</a:t>
             </a:fld>
             <a:endParaRPr lang="zh-TW" altLang="en-US"/>
           </a:p>
@@ -2058,7 +2058,7 @@
           <a:p>
             <a:fld id="{6930F9A4-4469-4216-8732-74830AAB3356}" type="datetimeFigureOut">
               <a:rPr lang="zh-TW" altLang="en-US" smtClean="0"/>
-              <a:t>2025/9/1</a:t>
+              <a:t>2025/9/9</a:t>
             </a:fld>
             <a:endParaRPr lang="zh-TW" altLang="en-US"/>
           </a:p>
@@ -2176,7 +2176,7 @@
           <a:p>
             <a:fld id="{6930F9A4-4469-4216-8732-74830AAB3356}" type="datetimeFigureOut">
               <a:rPr lang="zh-TW" altLang="en-US" smtClean="0"/>
-              <a:t>2025/9/1</a:t>
+              <a:t>2025/9/9</a:t>
             </a:fld>
             <a:endParaRPr lang="zh-TW" altLang="en-US"/>
           </a:p>
@@ -2271,7 +2271,7 @@
           <a:p>
             <a:fld id="{6930F9A4-4469-4216-8732-74830AAB3356}" type="datetimeFigureOut">
               <a:rPr lang="zh-TW" altLang="en-US" smtClean="0"/>
-              <a:t>2025/9/1</a:t>
+              <a:t>2025/9/9</a:t>
             </a:fld>
             <a:endParaRPr lang="zh-TW" altLang="en-US"/>
           </a:p>
@@ -2548,7 +2548,7 @@
           <a:p>
             <a:fld id="{6930F9A4-4469-4216-8732-74830AAB3356}" type="datetimeFigureOut">
               <a:rPr lang="zh-TW" altLang="en-US" smtClean="0"/>
-              <a:t>2025/9/1</a:t>
+              <a:t>2025/9/9</a:t>
             </a:fld>
             <a:endParaRPr lang="zh-TW" altLang="en-US"/>
           </a:p>
@@ -2801,7 +2801,7 @@
           <a:p>
             <a:fld id="{6930F9A4-4469-4216-8732-74830AAB3356}" type="datetimeFigureOut">
               <a:rPr lang="zh-TW" altLang="en-US" smtClean="0"/>
-              <a:t>2025/9/1</a:t>
+              <a:t>2025/9/9</a:t>
             </a:fld>
             <a:endParaRPr lang="zh-TW" altLang="en-US"/>
           </a:p>
@@ -3014,7 +3014,7 @@
           <a:p>
             <a:fld id="{6930F9A4-4469-4216-8732-74830AAB3356}" type="datetimeFigureOut">
               <a:rPr lang="zh-TW" altLang="en-US" smtClean="0"/>
-              <a:t>2025/9/1</a:t>
+              <a:t>2025/9/9</a:t>
             </a:fld>
             <a:endParaRPr lang="zh-TW" altLang="en-US"/>
           </a:p>
@@ -3542,17 +3542,7 @@
                 <a:latin typeface="標楷體" panose="03000509000000000000" pitchFamily="65" charset="-120"/>
                 <a:ea typeface="標楷體" panose="03000509000000000000" pitchFamily="65" charset="-120"/>
               </a:rPr>
-              <a:t>學年</a:t>
-            </a:r>
-            <a:r>
-              <a:rPr lang="zh-TW" altLang="en-US" sz="2800" dirty="0" smtClean="0">
-                <a:solidFill>
-                  <a:srgbClr val="FF0000"/>
-                </a:solidFill>
-                <a:latin typeface="標楷體" panose="03000509000000000000" pitchFamily="65" charset="-120"/>
-                <a:ea typeface="標楷體" panose="03000509000000000000" pitchFamily="65" charset="-120"/>
-              </a:rPr>
-              <a:t>上學期</a:t>
+              <a:t>學年上學期</a:t>
             </a:r>
             <a:r>
               <a:rPr lang="en-US" altLang="zh-TW" sz="2800" dirty="0" smtClean="0">
@@ -3647,6 +3637,419 @@
 </file>
 
 <file path=ppt/slides/slide2.xml><?xml version="1.0" encoding="utf-8"?>
+<p:sld xmlns:a="http://schemas.openxmlformats.org/drawingml/2006/main" xmlns:r="http://schemas.openxmlformats.org/officeDocument/2006/relationships" xmlns:p="http://schemas.openxmlformats.org/presentationml/2006/main">
+  <p:cSld>
+    <p:spTree>
+      <p:nvGrpSpPr>
+        <p:cNvPr id="1" name=""/>
+        <p:cNvGrpSpPr/>
+        <p:nvPr/>
+      </p:nvGrpSpPr>
+      <p:grpSpPr>
+        <a:xfrm>
+          <a:off x="0" y="0"/>
+          <a:ext cx="0" cy="0"/>
+          <a:chOff x="0" y="0"/>
+          <a:chExt cx="0" cy="0"/>
+        </a:xfrm>
+      </p:grpSpPr>
+      <p:sp>
+        <p:nvSpPr>
+          <p:cNvPr id="2" name="標題 1"/>
+          <p:cNvSpPr>
+            <a:spLocks noGrp="1"/>
+          </p:cNvSpPr>
+          <p:nvPr>
+            <p:ph type="title"/>
+          </p:nvPr>
+        </p:nvSpPr>
+        <p:spPr>
+          <a:xfrm>
+            <a:off x="838200" y="200368"/>
+            <a:ext cx="10515600" cy="1183589"/>
+          </a:xfrm>
+        </p:spPr>
+        <p:txBody>
+          <a:bodyPr>
+            <a:normAutofit fontScale="90000"/>
+          </a:bodyPr>
+          <a:lstStyle/>
+          <a:p>
+            <a:pPr algn="ctr"/>
+            <a:r>
+              <a:rPr lang="zh-TW" altLang="en-US" dirty="0" smtClean="0">
+                <a:solidFill>
+                  <a:srgbClr val="FF0000"/>
+                </a:solidFill>
+                <a:latin typeface="標楷體" panose="03000509000000000000" pitchFamily="65" charset="-120"/>
+                <a:ea typeface="標楷體" panose="03000509000000000000" pitchFamily="65" charset="-120"/>
+              </a:rPr>
+              <a:t>資料</a:t>
+            </a:r>
+            <a:r>
+              <a:rPr lang="zh-TW" altLang="en-US" dirty="0">
+                <a:solidFill>
+                  <a:srgbClr val="FF0000"/>
+                </a:solidFill>
+                <a:latin typeface="標楷體" panose="03000509000000000000" pitchFamily="65" charset="-120"/>
+                <a:ea typeface="標楷體" panose="03000509000000000000" pitchFamily="65" charset="-120"/>
+              </a:rPr>
+              <a:t>探勘 </a:t>
+            </a:r>
+            <a:r>
+              <a:rPr lang="en-US" altLang="zh-TW" dirty="0">
+                <a:solidFill>
+                  <a:srgbClr val="FF0000"/>
+                </a:solidFill>
+                <a:latin typeface="標楷體" panose="03000509000000000000" pitchFamily="65" charset="-120"/>
+                <a:ea typeface="標楷體" panose="03000509000000000000" pitchFamily="65" charset="-120"/>
+              </a:rPr>
+              <a:t>Data Mining</a:t>
+            </a:r>
+            <a:br>
+              <a:rPr lang="en-US" altLang="zh-TW" dirty="0">
+                <a:solidFill>
+                  <a:srgbClr val="FF0000"/>
+                </a:solidFill>
+                <a:latin typeface="標楷體" panose="03000509000000000000" pitchFamily="65" charset="-120"/>
+                <a:ea typeface="標楷體" panose="03000509000000000000" pitchFamily="65" charset="-120"/>
+              </a:rPr>
+            </a:br>
+            <a:r>
+              <a:rPr lang="en-US" altLang="zh-TW" dirty="0" smtClean="0">
+                <a:solidFill>
+                  <a:srgbClr val="0000FF"/>
+                </a:solidFill>
+                <a:latin typeface="標楷體" panose="03000509000000000000" pitchFamily="65" charset="-120"/>
+                <a:ea typeface="標楷體" panose="03000509000000000000" pitchFamily="65" charset="-120"/>
+              </a:rPr>
+              <a:t>1.</a:t>
+            </a:r>
+            <a:r>
+              <a:rPr lang="zh-TW" altLang="en-US" dirty="0" smtClean="0">
+                <a:solidFill>
+                  <a:srgbClr val="0000FF"/>
+                </a:solidFill>
+                <a:latin typeface="標楷體" panose="03000509000000000000" pitchFamily="65" charset="-120"/>
+                <a:ea typeface="標楷體" panose="03000509000000000000" pitchFamily="65" charset="-120"/>
+              </a:rPr>
+              <a:t>課堂規定</a:t>
+            </a:r>
+            <a:endParaRPr lang="zh-TW" altLang="en-US" dirty="0"/>
+          </a:p>
+        </p:txBody>
+      </p:sp>
+      <p:sp>
+        <p:nvSpPr>
+          <p:cNvPr id="3" name="內容版面配置區 2"/>
+          <p:cNvSpPr>
+            <a:spLocks noGrp="1"/>
+          </p:cNvSpPr>
+          <p:nvPr>
+            <p:ph idx="1"/>
+          </p:nvPr>
+        </p:nvSpPr>
+        <p:spPr>
+          <a:xfrm>
+            <a:off x="1119922" y="2021999"/>
+            <a:ext cx="10157678" cy="4498874"/>
+          </a:xfrm>
+        </p:spPr>
+        <p:txBody>
+          <a:bodyPr>
+            <a:noAutofit/>
+          </a:bodyPr>
+          <a:lstStyle/>
+          <a:p>
+            <a:r>
+              <a:rPr lang="zh-TW" altLang="en-US" sz="3200" dirty="0" smtClean="0">
+                <a:latin typeface="標楷體" panose="03000509000000000000" pitchFamily="65" charset="-120"/>
+                <a:ea typeface="標楷體" panose="03000509000000000000" pitchFamily="65" charset="-120"/>
+              </a:rPr>
+              <a:t>上課</a:t>
+            </a:r>
+            <a:r>
+              <a:rPr lang="en-US" altLang="zh-TW" sz="3200" dirty="0">
+                <a:latin typeface="標楷體" panose="03000509000000000000" pitchFamily="65" charset="-120"/>
+                <a:ea typeface="標楷體" panose="03000509000000000000" pitchFamily="65" charset="-120"/>
+              </a:rPr>
+              <a:t>5</a:t>
+            </a:r>
+            <a:r>
+              <a:rPr lang="zh-TW" altLang="en-US" sz="3200" dirty="0">
+                <a:latin typeface="標楷體" panose="03000509000000000000" pitchFamily="65" charset="-120"/>
+                <a:ea typeface="標楷體" panose="03000509000000000000" pitchFamily="65" charset="-120"/>
+              </a:rPr>
+              <a:t>分鐘</a:t>
+            </a:r>
+            <a:r>
+              <a:rPr lang="zh-TW" altLang="en-US" sz="3200" dirty="0" smtClean="0">
+                <a:latin typeface="標楷體" panose="03000509000000000000" pitchFamily="65" charset="-120"/>
+                <a:ea typeface="標楷體" panose="03000509000000000000" pitchFamily="65" charset="-120"/>
+              </a:rPr>
+              <a:t>後進</a:t>
+            </a:r>
+            <a:r>
+              <a:rPr lang="zh-TW" altLang="en-US" sz="3200" dirty="0">
+                <a:latin typeface="標楷體" panose="03000509000000000000" pitchFamily="65" charset="-120"/>
+                <a:ea typeface="標楷體" panose="03000509000000000000" pitchFamily="65" charset="-120"/>
+              </a:rPr>
+              <a:t>教室算</a:t>
+            </a:r>
+            <a:r>
+              <a:rPr lang="zh-TW" altLang="en-US" sz="3200" dirty="0" smtClean="0">
+                <a:latin typeface="標楷體" panose="03000509000000000000" pitchFamily="65" charset="-120"/>
+                <a:ea typeface="標楷體" panose="03000509000000000000" pitchFamily="65" charset="-120"/>
+              </a:rPr>
+              <a:t>遲到</a:t>
+            </a:r>
+            <a:endParaRPr lang="en-US" altLang="zh-TW" sz="3200" dirty="0">
+              <a:latin typeface="標楷體" panose="03000509000000000000" pitchFamily="65" charset="-120"/>
+              <a:ea typeface="標楷體" panose="03000509000000000000" pitchFamily="65" charset="-120"/>
+            </a:endParaRPr>
+          </a:p>
+          <a:p>
+            <a:r>
+              <a:rPr lang="zh-TW" altLang="en-US" sz="3200" dirty="0" smtClean="0">
+                <a:solidFill>
+                  <a:srgbClr val="FF0000"/>
+                </a:solidFill>
+                <a:latin typeface="標楷體" panose="03000509000000000000" pitchFamily="65" charset="-120"/>
+                <a:ea typeface="標楷體" panose="03000509000000000000" pitchFamily="65" charset="-120"/>
+              </a:rPr>
+              <a:t>上課禁用手機，請專心上課</a:t>
+            </a:r>
+            <a:endParaRPr lang="en-US" altLang="zh-TW" sz="3200" dirty="0" smtClean="0">
+              <a:solidFill>
+                <a:srgbClr val="FF0000"/>
+              </a:solidFill>
+              <a:latin typeface="標楷體" panose="03000509000000000000" pitchFamily="65" charset="-120"/>
+              <a:ea typeface="標楷體" panose="03000509000000000000" pitchFamily="65" charset="-120"/>
+            </a:endParaRPr>
+          </a:p>
+          <a:p>
+            <a:r>
+              <a:rPr lang="zh-TW" altLang="en-US" sz="3200" dirty="0" smtClean="0">
+                <a:latin typeface="標楷體" panose="03000509000000000000" pitchFamily="65" charset="-120"/>
+                <a:ea typeface="標楷體" panose="03000509000000000000" pitchFamily="65" charset="-120"/>
+              </a:rPr>
+              <a:t>想睡覺的，建議洗臉</a:t>
+            </a:r>
+            <a:r>
+              <a:rPr lang="zh-TW" altLang="en-US" sz="3200" dirty="0" smtClean="0">
+                <a:latin typeface="PMingLiU" panose="02020500000000000000" pitchFamily="18" charset="-120"/>
+                <a:ea typeface="PMingLiU" panose="02020500000000000000" pitchFamily="18" charset="-120"/>
+              </a:rPr>
+              <a:t>、</a:t>
+            </a:r>
+            <a:r>
+              <a:rPr lang="zh-TW" altLang="en-US" sz="3200" dirty="0">
+                <a:latin typeface="標楷體" panose="03000509000000000000" pitchFamily="65" charset="-120"/>
+                <a:ea typeface="標楷體" panose="03000509000000000000" pitchFamily="65" charset="-120"/>
+              </a:rPr>
+              <a:t>站立上課</a:t>
+            </a:r>
+            <a:r>
+              <a:rPr lang="zh-TW" altLang="en-US" sz="3200" dirty="0" smtClean="0">
+                <a:latin typeface="標楷體" panose="03000509000000000000" pitchFamily="65" charset="-120"/>
+                <a:ea typeface="標楷體" panose="03000509000000000000" pitchFamily="65" charset="-120"/>
+              </a:rPr>
+              <a:t>或</a:t>
+            </a:r>
+            <a:r>
+              <a:rPr lang="en-US" altLang="zh-TW" sz="3200" dirty="0" smtClean="0">
+                <a:latin typeface="標楷體" panose="03000509000000000000" pitchFamily="65" charset="-120"/>
+                <a:ea typeface="標楷體" panose="03000509000000000000" pitchFamily="65" charset="-120"/>
+              </a:rPr>
+              <a:t>5</a:t>
+            </a:r>
+            <a:r>
+              <a:rPr lang="zh-TW" altLang="en-US" sz="3200" dirty="0" smtClean="0">
+                <a:latin typeface="標楷體" panose="03000509000000000000" pitchFamily="65" charset="-120"/>
+                <a:ea typeface="標楷體" panose="03000509000000000000" pitchFamily="65" charset="-120"/>
+              </a:rPr>
+              <a:t>分鐘</a:t>
+            </a:r>
+            <a:r>
+              <a:rPr lang="en-US" altLang="zh-TW" sz="3200" dirty="0" smtClean="0">
+                <a:latin typeface="標楷體" panose="03000509000000000000" pitchFamily="65" charset="-120"/>
+                <a:ea typeface="標楷體" panose="03000509000000000000" pitchFamily="65" charset="-120"/>
+              </a:rPr>
+              <a:t>Free</a:t>
+            </a:r>
+          </a:p>
+          <a:p>
+            <a:r>
+              <a:rPr lang="zh-TW" altLang="en-US" sz="3200" dirty="0" smtClean="0">
+                <a:latin typeface="標楷體" panose="03000509000000000000" pitchFamily="65" charset="-120"/>
+                <a:ea typeface="標楷體" panose="03000509000000000000" pitchFamily="65" charset="-120"/>
+              </a:rPr>
+              <a:t>上課吵鬧，影響到老師同學，予以糾正</a:t>
+            </a:r>
+            <a:endParaRPr lang="en-US" altLang="zh-TW" sz="3200" dirty="0" smtClean="0">
+              <a:latin typeface="標楷體" panose="03000509000000000000" pitchFamily="65" charset="-120"/>
+              <a:ea typeface="標楷體" panose="03000509000000000000" pitchFamily="65" charset="-120"/>
+            </a:endParaRPr>
+          </a:p>
+          <a:p>
+            <a:r>
+              <a:rPr lang="en-US" altLang="zh-TW" sz="3200" dirty="0">
+                <a:solidFill>
+                  <a:srgbClr val="0000FF"/>
+                </a:solidFill>
+                <a:latin typeface="標楷體" panose="03000509000000000000" pitchFamily="65" charset="-120"/>
+                <a:ea typeface="標楷體" panose="03000509000000000000" pitchFamily="65" charset="-120"/>
+              </a:rPr>
+              <a:t>1/3 (</a:t>
+            </a:r>
+            <a:r>
+              <a:rPr lang="zh-TW" altLang="en-US" sz="3200" dirty="0">
+                <a:solidFill>
+                  <a:srgbClr val="0000FF"/>
+                </a:solidFill>
+                <a:latin typeface="標楷體" panose="03000509000000000000" pitchFamily="65" charset="-120"/>
+                <a:ea typeface="標楷體" panose="03000509000000000000" pitchFamily="65" charset="-120"/>
+              </a:rPr>
+              <a:t>含</a:t>
+            </a:r>
+            <a:r>
+              <a:rPr lang="en-US" altLang="zh-TW" sz="3200" dirty="0">
+                <a:solidFill>
+                  <a:srgbClr val="0000FF"/>
+                </a:solidFill>
+                <a:latin typeface="標楷體" panose="03000509000000000000" pitchFamily="65" charset="-120"/>
+                <a:ea typeface="標楷體" panose="03000509000000000000" pitchFamily="65" charset="-120"/>
+              </a:rPr>
+              <a:t>)</a:t>
+            </a:r>
+            <a:r>
+              <a:rPr lang="zh-TW" altLang="en-US" sz="3200" dirty="0">
+                <a:solidFill>
+                  <a:srgbClr val="0000FF"/>
+                </a:solidFill>
+                <a:latin typeface="標楷體" panose="03000509000000000000" pitchFamily="65" charset="-120"/>
+                <a:ea typeface="標楷體" panose="03000509000000000000" pitchFamily="65" charset="-120"/>
+              </a:rPr>
+              <a:t>以上未出席課程無法給予學分</a:t>
+            </a:r>
+            <a:r>
+              <a:rPr lang="zh-TW" altLang="en-US" sz="3200" dirty="0">
+                <a:latin typeface="標楷體" panose="03000509000000000000" pitchFamily="65" charset="-120"/>
+                <a:ea typeface="標楷體" panose="03000509000000000000" pitchFamily="65" charset="-120"/>
+              </a:rPr>
+              <a:t>，</a:t>
+            </a:r>
+            <a:r>
+              <a:rPr lang="en-US" altLang="zh-TW" sz="3200" dirty="0">
+                <a:latin typeface="標楷體" panose="03000509000000000000" pitchFamily="65" charset="-120"/>
+                <a:ea typeface="標楷體" panose="03000509000000000000" pitchFamily="65" charset="-120"/>
+              </a:rPr>
+              <a:t>2</a:t>
+            </a:r>
+            <a:r>
+              <a:rPr lang="zh-TW" altLang="en-US" sz="3200" dirty="0">
+                <a:latin typeface="標楷體" panose="03000509000000000000" pitchFamily="65" charset="-120"/>
+                <a:ea typeface="標楷體" panose="03000509000000000000" pitchFamily="65" charset="-120"/>
+              </a:rPr>
+              <a:t>次遲到算</a:t>
+            </a:r>
+            <a:r>
+              <a:rPr lang="en-US" altLang="zh-TW" sz="3200" dirty="0">
+                <a:latin typeface="標楷體" panose="03000509000000000000" pitchFamily="65" charset="-120"/>
+                <a:ea typeface="標楷體" panose="03000509000000000000" pitchFamily="65" charset="-120"/>
+              </a:rPr>
+              <a:t>1</a:t>
+            </a:r>
+            <a:r>
+              <a:rPr lang="zh-TW" altLang="en-US" sz="3200" dirty="0">
+                <a:latin typeface="標楷體" panose="03000509000000000000" pitchFamily="65" charset="-120"/>
+                <a:ea typeface="標楷體" panose="03000509000000000000" pitchFamily="65" charset="-120"/>
+              </a:rPr>
+              <a:t>次未到課</a:t>
+            </a:r>
+            <a:endParaRPr lang="en-US" altLang="zh-TW" sz="3200" dirty="0">
+              <a:latin typeface="標楷體" panose="03000509000000000000" pitchFamily="65" charset="-120"/>
+              <a:ea typeface="標楷體" panose="03000509000000000000" pitchFamily="65" charset="-120"/>
+            </a:endParaRPr>
+          </a:p>
+          <a:p>
+            <a:endParaRPr lang="en-US" altLang="zh-TW" sz="3200" dirty="0">
+              <a:latin typeface="標楷體" panose="03000509000000000000" pitchFamily="65" charset="-120"/>
+              <a:ea typeface="標楷體" panose="03000509000000000000" pitchFamily="65" charset="-120"/>
+            </a:endParaRPr>
+          </a:p>
+          <a:p>
+            <a:r>
+              <a:rPr lang="zh-TW" altLang="en-US" sz="3200" dirty="0" smtClean="0">
+                <a:solidFill>
+                  <a:srgbClr val="0000FF"/>
+                </a:solidFill>
+                <a:latin typeface="標楷體" panose="03000509000000000000" pitchFamily="65" charset="-120"/>
+                <a:ea typeface="標楷體" panose="03000509000000000000" pitchFamily="65" charset="-120"/>
+              </a:rPr>
+              <a:t>為加強同學上課專注度，請同學回答問題</a:t>
+            </a:r>
+            <a:r>
+              <a:rPr lang="en-US" altLang="zh-TW" sz="3200" dirty="0" smtClean="0">
+                <a:solidFill>
+                  <a:srgbClr val="0000FF"/>
+                </a:solidFill>
+                <a:latin typeface="標楷體" panose="03000509000000000000" pitchFamily="65" charset="-120"/>
+                <a:ea typeface="標楷體" panose="03000509000000000000" pitchFamily="65" charset="-120"/>
+              </a:rPr>
+              <a:t>(</a:t>
+            </a:r>
+            <a:r>
+              <a:rPr lang="zh-TW" altLang="en-US" sz="3200" dirty="0" smtClean="0">
+                <a:solidFill>
+                  <a:srgbClr val="0000FF"/>
+                </a:solidFill>
+                <a:latin typeface="標楷體" panose="03000509000000000000" pitchFamily="65" charset="-120"/>
+                <a:ea typeface="標楷體" panose="03000509000000000000" pitchFamily="65" charset="-120"/>
+              </a:rPr>
+              <a:t>課堂表現</a:t>
+            </a:r>
+            <a:r>
+              <a:rPr lang="en-US" altLang="zh-TW" sz="3200" dirty="0" smtClean="0">
+                <a:solidFill>
+                  <a:srgbClr val="0000FF"/>
+                </a:solidFill>
+                <a:latin typeface="標楷體" panose="03000509000000000000" pitchFamily="65" charset="-120"/>
+                <a:ea typeface="標楷體" panose="03000509000000000000" pitchFamily="65" charset="-120"/>
+              </a:rPr>
+              <a:t>)</a:t>
+            </a:r>
+            <a:endParaRPr lang="en-US" altLang="zh-TW" sz="3200" dirty="0">
+              <a:solidFill>
+                <a:srgbClr val="0000FF"/>
+              </a:solidFill>
+              <a:latin typeface="標楷體" panose="03000509000000000000" pitchFamily="65" charset="-120"/>
+              <a:ea typeface="標楷體" panose="03000509000000000000" pitchFamily="65" charset="-120"/>
+            </a:endParaRPr>
+          </a:p>
+        </p:txBody>
+      </p:sp>
+    </p:spTree>
+    <p:extLst>
+      <p:ext uri="{BB962C8B-B14F-4D97-AF65-F5344CB8AC3E}">
+        <p14:creationId xmlns:p14="http://schemas.microsoft.com/office/powerpoint/2010/main" val="367340970"/>
+      </p:ext>
+    </p:extLst>
+  </p:cSld>
+  <p:clrMapOvr>
+    <a:masterClrMapping/>
+  </p:clrMapOvr>
+  <p:timing>
+    <p:tnLst>
+      <p:par>
+        <p:cTn id="1" dur="indefinite" restart="never" nodeType="tmRoot"/>
+      </p:par>
+    </p:tnLst>
+  </p:timing>
+</p:sld>
+</file>
+
+<file path=ppt/slides/slide3.xml><?xml version="1.0" encoding="utf-8"?>
 <p:sld xmlns:a="http://schemas.openxmlformats.org/drawingml/2006/main" xmlns:r="http://schemas.openxmlformats.org/officeDocument/2006/relationships" xmlns:p="http://schemas.openxmlformats.org/presentationml/2006/main">
   <p:cSld>
     <p:spTree>
@@ -3753,7 +4156,7 @@
                 <a:latin typeface="標楷體" panose="03000509000000000000" pitchFamily="65" charset="-120"/>
                 <a:ea typeface="標楷體" panose="03000509000000000000" pitchFamily="65" charset="-120"/>
               </a:rPr>
-              <a:t>1.</a:t>
+              <a:t>2.</a:t>
             </a:r>
             <a:r>
               <a:rPr lang="zh-TW" altLang="en-US" dirty="0" smtClean="0">
@@ -4244,419 +4647,6 @@
 </p:sld>
 </file>
 
-<file path=ppt/slides/slide3.xml><?xml version="1.0" encoding="utf-8"?>
-<p:sld xmlns:a="http://schemas.openxmlformats.org/drawingml/2006/main" xmlns:r="http://schemas.openxmlformats.org/officeDocument/2006/relationships" xmlns:p="http://schemas.openxmlformats.org/presentationml/2006/main">
-  <p:cSld>
-    <p:spTree>
-      <p:nvGrpSpPr>
-        <p:cNvPr id="1" name=""/>
-        <p:cNvGrpSpPr/>
-        <p:nvPr/>
-      </p:nvGrpSpPr>
-      <p:grpSpPr>
-        <a:xfrm>
-          <a:off x="0" y="0"/>
-          <a:ext cx="0" cy="0"/>
-          <a:chOff x="0" y="0"/>
-          <a:chExt cx="0" cy="0"/>
-        </a:xfrm>
-      </p:grpSpPr>
-      <p:sp>
-        <p:nvSpPr>
-          <p:cNvPr id="2" name="標題 1"/>
-          <p:cNvSpPr>
-            <a:spLocks noGrp="1"/>
-          </p:cNvSpPr>
-          <p:nvPr>
-            <p:ph type="title"/>
-          </p:nvPr>
-        </p:nvSpPr>
-        <p:spPr>
-          <a:xfrm>
-            <a:off x="838200" y="200368"/>
-            <a:ext cx="10515600" cy="1183589"/>
-          </a:xfrm>
-        </p:spPr>
-        <p:txBody>
-          <a:bodyPr>
-            <a:normAutofit fontScale="90000"/>
-          </a:bodyPr>
-          <a:lstStyle/>
-          <a:p>
-            <a:pPr algn="ctr"/>
-            <a:r>
-              <a:rPr lang="zh-TW" altLang="en-US" dirty="0" smtClean="0">
-                <a:solidFill>
-                  <a:srgbClr val="FF0000"/>
-                </a:solidFill>
-                <a:latin typeface="標楷體" panose="03000509000000000000" pitchFamily="65" charset="-120"/>
-                <a:ea typeface="標楷體" panose="03000509000000000000" pitchFamily="65" charset="-120"/>
-              </a:rPr>
-              <a:t>資料</a:t>
-            </a:r>
-            <a:r>
-              <a:rPr lang="zh-TW" altLang="en-US" dirty="0">
-                <a:solidFill>
-                  <a:srgbClr val="FF0000"/>
-                </a:solidFill>
-                <a:latin typeface="標楷體" panose="03000509000000000000" pitchFamily="65" charset="-120"/>
-                <a:ea typeface="標楷體" panose="03000509000000000000" pitchFamily="65" charset="-120"/>
-              </a:rPr>
-              <a:t>探勘 </a:t>
-            </a:r>
-            <a:r>
-              <a:rPr lang="en-US" altLang="zh-TW" dirty="0">
-                <a:solidFill>
-                  <a:srgbClr val="FF0000"/>
-                </a:solidFill>
-                <a:latin typeface="標楷體" panose="03000509000000000000" pitchFamily="65" charset="-120"/>
-                <a:ea typeface="標楷體" panose="03000509000000000000" pitchFamily="65" charset="-120"/>
-              </a:rPr>
-              <a:t>Data Mining</a:t>
-            </a:r>
-            <a:br>
-              <a:rPr lang="en-US" altLang="zh-TW" dirty="0">
-                <a:solidFill>
-                  <a:srgbClr val="FF0000"/>
-                </a:solidFill>
-                <a:latin typeface="標楷體" panose="03000509000000000000" pitchFamily="65" charset="-120"/>
-                <a:ea typeface="標楷體" panose="03000509000000000000" pitchFamily="65" charset="-120"/>
-              </a:rPr>
-            </a:br>
-            <a:r>
-              <a:rPr lang="en-US" altLang="zh-TW" dirty="0" smtClean="0">
-                <a:solidFill>
-                  <a:srgbClr val="0000FF"/>
-                </a:solidFill>
-                <a:latin typeface="標楷體" panose="03000509000000000000" pitchFamily="65" charset="-120"/>
-                <a:ea typeface="標楷體" panose="03000509000000000000" pitchFamily="65" charset="-120"/>
-              </a:rPr>
-              <a:t>2.</a:t>
-            </a:r>
-            <a:r>
-              <a:rPr lang="zh-TW" altLang="en-US" dirty="0" smtClean="0">
-                <a:solidFill>
-                  <a:srgbClr val="0000FF"/>
-                </a:solidFill>
-                <a:latin typeface="標楷體" panose="03000509000000000000" pitchFamily="65" charset="-120"/>
-                <a:ea typeface="標楷體" panose="03000509000000000000" pitchFamily="65" charset="-120"/>
-              </a:rPr>
-              <a:t>課堂規定</a:t>
-            </a:r>
-            <a:endParaRPr lang="zh-TW" altLang="en-US" dirty="0"/>
-          </a:p>
-        </p:txBody>
-      </p:sp>
-      <p:sp>
-        <p:nvSpPr>
-          <p:cNvPr id="3" name="內容版面配置區 2"/>
-          <p:cNvSpPr>
-            <a:spLocks noGrp="1"/>
-          </p:cNvSpPr>
-          <p:nvPr>
-            <p:ph idx="1"/>
-          </p:nvPr>
-        </p:nvSpPr>
-        <p:spPr>
-          <a:xfrm>
-            <a:off x="1119922" y="2021999"/>
-            <a:ext cx="10157678" cy="4498874"/>
-          </a:xfrm>
-        </p:spPr>
-        <p:txBody>
-          <a:bodyPr>
-            <a:noAutofit/>
-          </a:bodyPr>
-          <a:lstStyle/>
-          <a:p>
-            <a:r>
-              <a:rPr lang="zh-TW" altLang="en-US" sz="3200" dirty="0" smtClean="0">
-                <a:latin typeface="標楷體" panose="03000509000000000000" pitchFamily="65" charset="-120"/>
-                <a:ea typeface="標楷體" panose="03000509000000000000" pitchFamily="65" charset="-120"/>
-              </a:rPr>
-              <a:t>上課</a:t>
-            </a:r>
-            <a:r>
-              <a:rPr lang="en-US" altLang="zh-TW" sz="3200" dirty="0">
-                <a:latin typeface="標楷體" panose="03000509000000000000" pitchFamily="65" charset="-120"/>
-                <a:ea typeface="標楷體" panose="03000509000000000000" pitchFamily="65" charset="-120"/>
-              </a:rPr>
-              <a:t>5</a:t>
-            </a:r>
-            <a:r>
-              <a:rPr lang="zh-TW" altLang="en-US" sz="3200" dirty="0">
-                <a:latin typeface="標楷體" panose="03000509000000000000" pitchFamily="65" charset="-120"/>
-                <a:ea typeface="標楷體" panose="03000509000000000000" pitchFamily="65" charset="-120"/>
-              </a:rPr>
-              <a:t>分鐘</a:t>
-            </a:r>
-            <a:r>
-              <a:rPr lang="zh-TW" altLang="en-US" sz="3200" dirty="0" smtClean="0">
-                <a:latin typeface="標楷體" panose="03000509000000000000" pitchFamily="65" charset="-120"/>
-                <a:ea typeface="標楷體" panose="03000509000000000000" pitchFamily="65" charset="-120"/>
-              </a:rPr>
-              <a:t>後進</a:t>
-            </a:r>
-            <a:r>
-              <a:rPr lang="zh-TW" altLang="en-US" sz="3200" dirty="0">
-                <a:latin typeface="標楷體" panose="03000509000000000000" pitchFamily="65" charset="-120"/>
-                <a:ea typeface="標楷體" panose="03000509000000000000" pitchFamily="65" charset="-120"/>
-              </a:rPr>
-              <a:t>教室算</a:t>
-            </a:r>
-            <a:r>
-              <a:rPr lang="zh-TW" altLang="en-US" sz="3200" dirty="0" smtClean="0">
-                <a:latin typeface="標楷體" panose="03000509000000000000" pitchFamily="65" charset="-120"/>
-                <a:ea typeface="標楷體" panose="03000509000000000000" pitchFamily="65" charset="-120"/>
-              </a:rPr>
-              <a:t>遲到</a:t>
-            </a:r>
-            <a:endParaRPr lang="en-US" altLang="zh-TW" sz="3200" dirty="0">
-              <a:latin typeface="標楷體" panose="03000509000000000000" pitchFamily="65" charset="-120"/>
-              <a:ea typeface="標楷體" panose="03000509000000000000" pitchFamily="65" charset="-120"/>
-            </a:endParaRPr>
-          </a:p>
-          <a:p>
-            <a:r>
-              <a:rPr lang="zh-TW" altLang="en-US" sz="3200" dirty="0" smtClean="0">
-                <a:solidFill>
-                  <a:srgbClr val="FF0000"/>
-                </a:solidFill>
-                <a:latin typeface="標楷體" panose="03000509000000000000" pitchFamily="65" charset="-120"/>
-                <a:ea typeface="標楷體" panose="03000509000000000000" pitchFamily="65" charset="-120"/>
-              </a:rPr>
-              <a:t>上課禁用手機，請專心上課</a:t>
-            </a:r>
-            <a:endParaRPr lang="en-US" altLang="zh-TW" sz="3200" dirty="0" smtClean="0">
-              <a:solidFill>
-                <a:srgbClr val="FF0000"/>
-              </a:solidFill>
-              <a:latin typeface="標楷體" panose="03000509000000000000" pitchFamily="65" charset="-120"/>
-              <a:ea typeface="標楷體" panose="03000509000000000000" pitchFamily="65" charset="-120"/>
-            </a:endParaRPr>
-          </a:p>
-          <a:p>
-            <a:r>
-              <a:rPr lang="zh-TW" altLang="en-US" sz="3200" dirty="0" smtClean="0">
-                <a:latin typeface="標楷體" panose="03000509000000000000" pitchFamily="65" charset="-120"/>
-                <a:ea typeface="標楷體" panose="03000509000000000000" pitchFamily="65" charset="-120"/>
-              </a:rPr>
-              <a:t>想睡覺的，建議洗臉</a:t>
-            </a:r>
-            <a:r>
-              <a:rPr lang="zh-TW" altLang="en-US" sz="3200" dirty="0" smtClean="0">
-                <a:latin typeface="PMingLiU" panose="02020500000000000000" pitchFamily="18" charset="-120"/>
-                <a:ea typeface="PMingLiU" panose="02020500000000000000" pitchFamily="18" charset="-120"/>
-              </a:rPr>
-              <a:t>、</a:t>
-            </a:r>
-            <a:r>
-              <a:rPr lang="zh-TW" altLang="en-US" sz="3200" dirty="0">
-                <a:latin typeface="標楷體" panose="03000509000000000000" pitchFamily="65" charset="-120"/>
-                <a:ea typeface="標楷體" panose="03000509000000000000" pitchFamily="65" charset="-120"/>
-              </a:rPr>
-              <a:t>站立上課</a:t>
-            </a:r>
-            <a:r>
-              <a:rPr lang="zh-TW" altLang="en-US" sz="3200" dirty="0" smtClean="0">
-                <a:latin typeface="標楷體" panose="03000509000000000000" pitchFamily="65" charset="-120"/>
-                <a:ea typeface="標楷體" panose="03000509000000000000" pitchFamily="65" charset="-120"/>
-              </a:rPr>
-              <a:t>或</a:t>
-            </a:r>
-            <a:r>
-              <a:rPr lang="en-US" altLang="zh-TW" sz="3200" dirty="0" smtClean="0">
-                <a:latin typeface="標楷體" panose="03000509000000000000" pitchFamily="65" charset="-120"/>
-                <a:ea typeface="標楷體" panose="03000509000000000000" pitchFamily="65" charset="-120"/>
-              </a:rPr>
-              <a:t>5</a:t>
-            </a:r>
-            <a:r>
-              <a:rPr lang="zh-TW" altLang="en-US" sz="3200" dirty="0" smtClean="0">
-                <a:latin typeface="標楷體" panose="03000509000000000000" pitchFamily="65" charset="-120"/>
-                <a:ea typeface="標楷體" panose="03000509000000000000" pitchFamily="65" charset="-120"/>
-              </a:rPr>
-              <a:t>分鐘</a:t>
-            </a:r>
-            <a:r>
-              <a:rPr lang="en-US" altLang="zh-TW" sz="3200" dirty="0" smtClean="0">
-                <a:latin typeface="標楷體" panose="03000509000000000000" pitchFamily="65" charset="-120"/>
-                <a:ea typeface="標楷體" panose="03000509000000000000" pitchFamily="65" charset="-120"/>
-              </a:rPr>
-              <a:t>Free</a:t>
-            </a:r>
-          </a:p>
-          <a:p>
-            <a:r>
-              <a:rPr lang="zh-TW" altLang="en-US" sz="3200" dirty="0" smtClean="0">
-                <a:latin typeface="標楷體" panose="03000509000000000000" pitchFamily="65" charset="-120"/>
-                <a:ea typeface="標楷體" panose="03000509000000000000" pitchFamily="65" charset="-120"/>
-              </a:rPr>
-              <a:t>上課吵鬧，影響到老師同學，予以糾正</a:t>
-            </a:r>
-            <a:endParaRPr lang="en-US" altLang="zh-TW" sz="3200" dirty="0" smtClean="0">
-              <a:latin typeface="標楷體" panose="03000509000000000000" pitchFamily="65" charset="-120"/>
-              <a:ea typeface="標楷體" panose="03000509000000000000" pitchFamily="65" charset="-120"/>
-            </a:endParaRPr>
-          </a:p>
-          <a:p>
-            <a:r>
-              <a:rPr lang="en-US" altLang="zh-TW" sz="3200" dirty="0">
-                <a:solidFill>
-                  <a:srgbClr val="0000FF"/>
-                </a:solidFill>
-                <a:latin typeface="標楷體" panose="03000509000000000000" pitchFamily="65" charset="-120"/>
-                <a:ea typeface="標楷體" panose="03000509000000000000" pitchFamily="65" charset="-120"/>
-              </a:rPr>
-              <a:t>1/3 (</a:t>
-            </a:r>
-            <a:r>
-              <a:rPr lang="zh-TW" altLang="en-US" sz="3200" dirty="0">
-                <a:solidFill>
-                  <a:srgbClr val="0000FF"/>
-                </a:solidFill>
-                <a:latin typeface="標楷體" panose="03000509000000000000" pitchFamily="65" charset="-120"/>
-                <a:ea typeface="標楷體" panose="03000509000000000000" pitchFamily="65" charset="-120"/>
-              </a:rPr>
-              <a:t>含</a:t>
-            </a:r>
-            <a:r>
-              <a:rPr lang="en-US" altLang="zh-TW" sz="3200" dirty="0">
-                <a:solidFill>
-                  <a:srgbClr val="0000FF"/>
-                </a:solidFill>
-                <a:latin typeface="標楷體" panose="03000509000000000000" pitchFamily="65" charset="-120"/>
-                <a:ea typeface="標楷體" panose="03000509000000000000" pitchFamily="65" charset="-120"/>
-              </a:rPr>
-              <a:t>)</a:t>
-            </a:r>
-            <a:r>
-              <a:rPr lang="zh-TW" altLang="en-US" sz="3200" dirty="0">
-                <a:solidFill>
-                  <a:srgbClr val="0000FF"/>
-                </a:solidFill>
-                <a:latin typeface="標楷體" panose="03000509000000000000" pitchFamily="65" charset="-120"/>
-                <a:ea typeface="標楷體" panose="03000509000000000000" pitchFamily="65" charset="-120"/>
-              </a:rPr>
-              <a:t>以上未出席課程無法給予學分</a:t>
-            </a:r>
-            <a:r>
-              <a:rPr lang="zh-TW" altLang="en-US" sz="3200" dirty="0">
-                <a:latin typeface="標楷體" panose="03000509000000000000" pitchFamily="65" charset="-120"/>
-                <a:ea typeface="標楷體" panose="03000509000000000000" pitchFamily="65" charset="-120"/>
-              </a:rPr>
-              <a:t>，</a:t>
-            </a:r>
-            <a:r>
-              <a:rPr lang="en-US" altLang="zh-TW" sz="3200" dirty="0">
-                <a:latin typeface="標楷體" panose="03000509000000000000" pitchFamily="65" charset="-120"/>
-                <a:ea typeface="標楷體" panose="03000509000000000000" pitchFamily="65" charset="-120"/>
-              </a:rPr>
-              <a:t>2</a:t>
-            </a:r>
-            <a:r>
-              <a:rPr lang="zh-TW" altLang="en-US" sz="3200" dirty="0">
-                <a:latin typeface="標楷體" panose="03000509000000000000" pitchFamily="65" charset="-120"/>
-                <a:ea typeface="標楷體" panose="03000509000000000000" pitchFamily="65" charset="-120"/>
-              </a:rPr>
-              <a:t>次遲到算</a:t>
-            </a:r>
-            <a:r>
-              <a:rPr lang="en-US" altLang="zh-TW" sz="3200" dirty="0">
-                <a:latin typeface="標楷體" panose="03000509000000000000" pitchFamily="65" charset="-120"/>
-                <a:ea typeface="標楷體" panose="03000509000000000000" pitchFamily="65" charset="-120"/>
-              </a:rPr>
-              <a:t>1</a:t>
-            </a:r>
-            <a:r>
-              <a:rPr lang="zh-TW" altLang="en-US" sz="3200" dirty="0">
-                <a:latin typeface="標楷體" panose="03000509000000000000" pitchFamily="65" charset="-120"/>
-                <a:ea typeface="標楷體" panose="03000509000000000000" pitchFamily="65" charset="-120"/>
-              </a:rPr>
-              <a:t>次未到課</a:t>
-            </a:r>
-            <a:endParaRPr lang="en-US" altLang="zh-TW" sz="3200" dirty="0">
-              <a:latin typeface="標楷體" panose="03000509000000000000" pitchFamily="65" charset="-120"/>
-              <a:ea typeface="標楷體" panose="03000509000000000000" pitchFamily="65" charset="-120"/>
-            </a:endParaRPr>
-          </a:p>
-          <a:p>
-            <a:endParaRPr lang="en-US" altLang="zh-TW" sz="3200" dirty="0">
-              <a:latin typeface="標楷體" panose="03000509000000000000" pitchFamily="65" charset="-120"/>
-              <a:ea typeface="標楷體" panose="03000509000000000000" pitchFamily="65" charset="-120"/>
-            </a:endParaRPr>
-          </a:p>
-          <a:p>
-            <a:r>
-              <a:rPr lang="zh-TW" altLang="en-US" sz="3200" dirty="0" smtClean="0">
-                <a:solidFill>
-                  <a:srgbClr val="0000FF"/>
-                </a:solidFill>
-                <a:latin typeface="標楷體" panose="03000509000000000000" pitchFamily="65" charset="-120"/>
-                <a:ea typeface="標楷體" panose="03000509000000000000" pitchFamily="65" charset="-120"/>
-              </a:rPr>
-              <a:t>為加強同學上課專注度，請同學回答問題</a:t>
-            </a:r>
-            <a:r>
-              <a:rPr lang="en-US" altLang="zh-TW" sz="3200" dirty="0" smtClean="0">
-                <a:solidFill>
-                  <a:srgbClr val="0000FF"/>
-                </a:solidFill>
-                <a:latin typeface="標楷體" panose="03000509000000000000" pitchFamily="65" charset="-120"/>
-                <a:ea typeface="標楷體" panose="03000509000000000000" pitchFamily="65" charset="-120"/>
-              </a:rPr>
-              <a:t>(</a:t>
-            </a:r>
-            <a:r>
-              <a:rPr lang="zh-TW" altLang="en-US" sz="3200" dirty="0" smtClean="0">
-                <a:solidFill>
-                  <a:srgbClr val="0000FF"/>
-                </a:solidFill>
-                <a:latin typeface="標楷體" panose="03000509000000000000" pitchFamily="65" charset="-120"/>
-                <a:ea typeface="標楷體" panose="03000509000000000000" pitchFamily="65" charset="-120"/>
-              </a:rPr>
-              <a:t>課堂表現</a:t>
-            </a:r>
-            <a:r>
-              <a:rPr lang="en-US" altLang="zh-TW" sz="3200" dirty="0" smtClean="0">
-                <a:solidFill>
-                  <a:srgbClr val="0000FF"/>
-                </a:solidFill>
-                <a:latin typeface="標楷體" panose="03000509000000000000" pitchFamily="65" charset="-120"/>
-                <a:ea typeface="標楷體" panose="03000509000000000000" pitchFamily="65" charset="-120"/>
-              </a:rPr>
-              <a:t>)</a:t>
-            </a:r>
-            <a:endParaRPr lang="en-US" altLang="zh-TW" sz="3200" dirty="0">
-              <a:solidFill>
-                <a:srgbClr val="0000FF"/>
-              </a:solidFill>
-              <a:latin typeface="標楷體" panose="03000509000000000000" pitchFamily="65" charset="-120"/>
-              <a:ea typeface="標楷體" panose="03000509000000000000" pitchFamily="65" charset="-120"/>
-            </a:endParaRPr>
-          </a:p>
-        </p:txBody>
-      </p:sp>
-    </p:spTree>
-    <p:extLst>
-      <p:ext uri="{BB962C8B-B14F-4D97-AF65-F5344CB8AC3E}">
-        <p14:creationId xmlns:p14="http://schemas.microsoft.com/office/powerpoint/2010/main" val="367340970"/>
-      </p:ext>
-    </p:extLst>
-  </p:cSld>
-  <p:clrMapOvr>
-    <a:masterClrMapping/>
-  </p:clrMapOvr>
-  <p:timing>
-    <p:tnLst>
-      <p:par>
-        <p:cTn id="1" dur="indefinite" restart="never" nodeType="tmRoot"/>
-      </p:par>
-    </p:tnLst>
-  </p:timing>
-</p:sld>
-</file>
-
 <file path=ppt/slides/slide4.xml><?xml version="1.0" encoding="utf-8"?>
 <p:sld xmlns:a="http://schemas.openxmlformats.org/drawingml/2006/main" xmlns:r="http://schemas.openxmlformats.org/officeDocument/2006/relationships" xmlns:p="http://schemas.openxmlformats.org/presentationml/2006/main">
   <p:cSld>
@@ -4700,17 +4690,17 @@
                 <a:latin typeface="標楷體" panose="03000509000000000000" pitchFamily="65" charset="-120"/>
                 <a:ea typeface="標楷體" panose="03000509000000000000" pitchFamily="65" charset="-120"/>
               </a:rPr>
-              <a:t>本</a:t>
-            </a:r>
-            <a:r>
-              <a:rPr lang="zh-TW" altLang="en-US" dirty="0">
+              <a:t>課程焦點一</a:t>
+            </a:r>
+            <a:r>
+              <a:rPr lang="en-US" altLang="zh-TW" dirty="0" smtClean="0">
                 <a:solidFill>
                   <a:srgbClr val="FF0000"/>
                 </a:solidFill>
                 <a:latin typeface="標楷體" panose="03000509000000000000" pitchFamily="65" charset="-120"/>
                 <a:ea typeface="標楷體" panose="03000509000000000000" pitchFamily="65" charset="-120"/>
               </a:rPr>
-              <a:t>學期焦點</a:t>
+              <a:t>(4</a:t>
             </a:r>
             <a:r>
               <a:rPr lang="zh-TW" altLang="en-US" dirty="0" smtClean="0">
@@ -4720,7 +4710,7 @@
                 <a:latin typeface="標楷體" panose="03000509000000000000" pitchFamily="65" charset="-120"/>
                 <a:ea typeface="標楷體" panose="03000509000000000000" pitchFamily="65" charset="-120"/>
               </a:rPr>
-              <a:t>一</a:t>
+              <a:t>週</a:t>
             </a:r>
             <a:r>
               <a:rPr lang="en-US" altLang="zh-TW" dirty="0" smtClean="0">
@@ -4730,7 +4720,7 @@
                 <a:latin typeface="標楷體" panose="03000509000000000000" pitchFamily="65" charset="-120"/>
                 <a:ea typeface="標楷體" panose="03000509000000000000" pitchFamily="65" charset="-120"/>
               </a:rPr>
-              <a:t>:</a:t>
+              <a:t>):</a:t>
             </a:r>
             <a:r>
               <a:rPr lang="zh-TW" altLang="en-US" dirty="0" smtClean="0">
@@ -4781,66 +4771,6 @@
                 <a:ea typeface="標楷體" panose="03000509000000000000" pitchFamily="65" charset="-120"/>
               </a:rPr>
             </a:br>
-            <a:r>
-              <a:rPr lang="en-US" altLang="zh-TW" dirty="0" smtClean="0">
-                <a:solidFill>
-                  <a:srgbClr val="FF0000"/>
-                </a:solidFill>
-                <a:latin typeface="標楷體" panose="03000509000000000000" pitchFamily="65" charset="-120"/>
-                <a:ea typeface="標楷體" panose="03000509000000000000" pitchFamily="65" charset="-120"/>
-              </a:rPr>
-              <a:t>(</a:t>
-            </a:r>
-            <a:r>
-              <a:rPr lang="en-US" altLang="zh-TW" dirty="0">
-                <a:solidFill>
-                  <a:srgbClr val="FF0000"/>
-                </a:solidFill>
-                <a:latin typeface="標楷體" panose="03000509000000000000" pitchFamily="65" charset="-120"/>
-                <a:ea typeface="標楷體" panose="03000509000000000000" pitchFamily="65" charset="-120"/>
-              </a:rPr>
-              <a:t>12</a:t>
-            </a:r>
-            <a:r>
-              <a:rPr lang="zh-TW" altLang="en-US" dirty="0">
-                <a:solidFill>
-                  <a:srgbClr val="FF0000"/>
-                </a:solidFill>
-                <a:latin typeface="標楷體" panose="03000509000000000000" pitchFamily="65" charset="-120"/>
-                <a:ea typeface="標楷體" panose="03000509000000000000" pitchFamily="65" charset="-120"/>
-              </a:rPr>
-              <a:t>週</a:t>
-            </a:r>
-            <a:r>
-              <a:rPr lang="zh-TW" altLang="en-US" dirty="0" smtClean="0">
-                <a:solidFill>
-                  <a:srgbClr val="FF0000"/>
-                </a:solidFill>
-                <a:latin typeface="標楷體" panose="03000509000000000000" pitchFamily="65" charset="-120"/>
-                <a:ea typeface="標楷體" panose="03000509000000000000" pitchFamily="65" charset="-120"/>
-              </a:rPr>
-              <a:t>前</a:t>
-            </a:r>
-            <a:r>
-              <a:rPr lang="en-US" altLang="zh-TW" dirty="0" smtClean="0">
-                <a:solidFill>
-                  <a:srgbClr val="FF0000"/>
-                </a:solidFill>
-                <a:latin typeface="標楷體" panose="03000509000000000000" pitchFamily="65" charset="-120"/>
-                <a:ea typeface="標楷體" panose="03000509000000000000" pitchFamily="65" charset="-120"/>
-              </a:rPr>
-              <a:t>)</a:t>
-            </a:r>
-            <a:r>
-              <a:rPr lang="zh-TW" altLang="en-US" dirty="0">
-                <a:solidFill>
-                  <a:srgbClr val="0000FF"/>
-                </a:solidFill>
-                <a:latin typeface="標楷體" panose="03000509000000000000" pitchFamily="65" charset="-120"/>
-                <a:ea typeface="標楷體" panose="03000509000000000000" pitchFamily="65" charset="-120"/>
-              </a:rPr>
-              <a:t>課程方向</a:t>
-            </a:r>
             <a:endParaRPr lang="zh-TW" altLang="en-US" dirty="0">
               <a:solidFill>
                 <a:srgbClr val="FF0000"/>
@@ -5336,6 +5266,16 @@
           <a:p>
             <a:pPr algn="ctr"/>
             <a:r>
+              <a:rPr lang="zh-TW" altLang="en-US" dirty="0">
+                <a:solidFill>
+                  <a:srgbClr val="FF0000"/>
+                </a:solidFill>
+                <a:latin typeface="標楷體" panose="03000509000000000000" pitchFamily="65" charset="-120"/>
+                <a:ea typeface="標楷體" panose="03000509000000000000" pitchFamily="65" charset="-120"/>
+              </a:rPr>
+              <a:t>課程焦點</a:t>
+            </a:r>
+            <a:r>
               <a:rPr lang="zh-TW" altLang="en-US" dirty="0" smtClean="0">
                 <a:solidFill>
                   <a:srgbClr val="FF0000"/>
@@ -5343,17 +5283,17 @@
                 <a:latin typeface="標楷體" panose="03000509000000000000" pitchFamily="65" charset="-120"/>
                 <a:ea typeface="標楷體" panose="03000509000000000000" pitchFamily="65" charset="-120"/>
               </a:rPr>
-              <a:t>本</a:t>
-            </a:r>
-            <a:r>
-              <a:rPr lang="zh-TW" altLang="en-US" dirty="0">
+              <a:t>二</a:t>
+            </a:r>
+            <a:r>
+              <a:rPr lang="en-US" altLang="zh-TW" dirty="0" smtClean="0">
                 <a:solidFill>
                   <a:srgbClr val="FF0000"/>
                 </a:solidFill>
                 <a:latin typeface="標楷體" panose="03000509000000000000" pitchFamily="65" charset="-120"/>
                 <a:ea typeface="標楷體" panose="03000509000000000000" pitchFamily="65" charset="-120"/>
               </a:rPr>
-              <a:t>學期</a:t>
+              <a:t>(8</a:t>
             </a:r>
             <a:r>
               <a:rPr lang="zh-TW" altLang="en-US" dirty="0" smtClean="0">
@@ -5363,7 +5303,7 @@
                 <a:latin typeface="標楷體" panose="03000509000000000000" pitchFamily="65" charset="-120"/>
                 <a:ea typeface="標楷體" panose="03000509000000000000" pitchFamily="65" charset="-120"/>
               </a:rPr>
-              <a:t>焦點二</a:t>
+              <a:t>週</a:t>
             </a:r>
             <a:r>
               <a:rPr lang="en-US" altLang="zh-TW" dirty="0" smtClean="0">
@@ -5373,7 +5313,7 @@
                 <a:latin typeface="標楷體" panose="03000509000000000000" pitchFamily="65" charset="-120"/>
                 <a:ea typeface="標楷體" panose="03000509000000000000" pitchFamily="65" charset="-120"/>
               </a:rPr>
-              <a:t>:</a:t>
+              <a:t>):</a:t>
             </a:r>
             <a:r>
               <a:rPr lang="zh-TW" altLang="en-US" dirty="0" smtClean="0">
@@ -5383,429 +5323,11 @@
                 <a:latin typeface="標楷體" panose="03000509000000000000" pitchFamily="65" charset="-120"/>
                 <a:ea typeface="標楷體" panose="03000509000000000000" pitchFamily="65" charset="-120"/>
               </a:rPr>
-              <a:t>演算法</a:t>
-            </a:r>
-            <a:r>
-              <a:rPr lang="en-US" altLang="zh-TW" dirty="0" smtClean="0">
-                <a:solidFill>
-                  <a:srgbClr val="FF0000"/>
-                </a:solidFill>
-                <a:latin typeface="標楷體" panose="03000509000000000000" pitchFamily="65" charset="-120"/>
-                <a:ea typeface="標楷體" panose="03000509000000000000" pitchFamily="65" charset="-120"/>
-              </a:rPr>
-              <a:t>Algorithm</a:t>
-            </a:r>
-            <a:br>
-              <a:rPr lang="en-US" altLang="zh-TW" dirty="0" smtClean="0">
-                <a:solidFill>
-                  <a:srgbClr val="FF0000"/>
-                </a:solidFill>
-                <a:latin typeface="標楷體" panose="03000509000000000000" pitchFamily="65" charset="-120"/>
-                <a:ea typeface="標楷體" panose="03000509000000000000" pitchFamily="65" charset="-120"/>
-              </a:rPr>
-            </a:br>
-            <a:r>
-              <a:rPr lang="en-US" altLang="zh-TW" dirty="0" smtClean="0">
-                <a:solidFill>
-                  <a:srgbClr val="FF0000"/>
-                </a:solidFill>
-                <a:latin typeface="標楷體" panose="03000509000000000000" pitchFamily="65" charset="-120"/>
-                <a:ea typeface="標楷體" panose="03000509000000000000" pitchFamily="65" charset="-120"/>
-              </a:rPr>
-              <a:t>(</a:t>
-            </a:r>
-            <a:r>
-              <a:rPr lang="en-US" altLang="zh-TW" dirty="0">
-                <a:solidFill>
-                  <a:srgbClr val="FF0000"/>
-                </a:solidFill>
-                <a:latin typeface="標楷體" panose="03000509000000000000" pitchFamily="65" charset="-120"/>
-                <a:ea typeface="標楷體" panose="03000509000000000000" pitchFamily="65" charset="-120"/>
-              </a:rPr>
-              <a:t>12</a:t>
-            </a:r>
-            <a:r>
-              <a:rPr lang="zh-TW" altLang="en-US" dirty="0">
-                <a:solidFill>
-                  <a:srgbClr val="FF0000"/>
-                </a:solidFill>
-                <a:latin typeface="標楷體" panose="03000509000000000000" pitchFamily="65" charset="-120"/>
-                <a:ea typeface="標楷體" panose="03000509000000000000" pitchFamily="65" charset="-120"/>
-              </a:rPr>
-              <a:t>週前</a:t>
-            </a:r>
-            <a:r>
-              <a:rPr lang="en-US" altLang="zh-TW" dirty="0" smtClean="0">
-                <a:solidFill>
-                  <a:srgbClr val="FF0000"/>
-                </a:solidFill>
-                <a:latin typeface="標楷體" panose="03000509000000000000" pitchFamily="65" charset="-120"/>
-                <a:ea typeface="標楷體" panose="03000509000000000000" pitchFamily="65" charset="-120"/>
-              </a:rPr>
-              <a:t>)</a:t>
-            </a:r>
-            <a:r>
-              <a:rPr lang="zh-TW" altLang="en-US" dirty="0">
-                <a:solidFill>
-                  <a:srgbClr val="0000FF"/>
-                </a:solidFill>
-                <a:latin typeface="標楷體" panose="03000509000000000000" pitchFamily="65" charset="-120"/>
-                <a:ea typeface="標楷體" panose="03000509000000000000" pitchFamily="65" charset="-120"/>
-              </a:rPr>
-              <a:t>課程方向</a:t>
+              <a:t>機器學習演算法</a:t>
             </a:r>
             <a:endParaRPr lang="zh-TW" altLang="en-US" dirty="0">
               <a:solidFill>
                 <a:srgbClr val="FF0000"/>
-              </a:solidFill>
-              <a:latin typeface="標楷體" panose="03000509000000000000" pitchFamily="65" charset="-120"/>
-              <a:ea typeface="標楷體" panose="03000509000000000000" pitchFamily="65" charset="-120"/>
-            </a:endParaRPr>
-          </a:p>
-        </p:txBody>
-      </p:sp>
-      <p:sp>
-        <p:nvSpPr>
-          <p:cNvPr id="4" name="圓角矩形 3"/>
-          <p:cNvSpPr/>
-          <p:nvPr/>
-        </p:nvSpPr>
-        <p:spPr>
-          <a:xfrm>
-            <a:off x="920151" y="5904956"/>
-            <a:ext cx="10351698" cy="931653"/>
-          </a:xfrm>
-          <a:prstGeom prst="roundRect">
-            <a:avLst/>
-          </a:prstGeom>
-        </p:spPr>
-        <p:style>
-          <a:lnRef idx="2">
-            <a:schemeClr val="accent1">
-              <a:shade val="50000"/>
-            </a:schemeClr>
-          </a:lnRef>
-          <a:fillRef idx="1">
-            <a:schemeClr val="accent1"/>
-          </a:fillRef>
-          <a:effectRef idx="0">
-            <a:schemeClr val="accent1"/>
-          </a:effectRef>
-          <a:fontRef idx="minor">
-            <a:schemeClr val="lt1"/>
-          </a:fontRef>
-        </p:style>
-        <p:txBody>
-          <a:bodyPr rtlCol="0" anchor="ctr"/>
-          <a:lstStyle/>
-          <a:p>
-            <a:r>
-              <a:rPr lang="en-US" altLang="zh-TW" dirty="0" smtClean="0">
-                <a:solidFill>
-                  <a:srgbClr val="0000FF"/>
-                </a:solidFill>
-                <a:latin typeface="標楷體" panose="03000509000000000000" pitchFamily="65" charset="-120"/>
-                <a:ea typeface="標楷體" panose="03000509000000000000" pitchFamily="65" charset="-120"/>
-              </a:rPr>
-              <a:t>A.</a:t>
-            </a:r>
-            <a:r>
-              <a:rPr lang="zh-TW" altLang="en-US" dirty="0" smtClean="0">
-                <a:solidFill>
-                  <a:srgbClr val="0000FF"/>
-                </a:solidFill>
-                <a:latin typeface="標楷體" panose="03000509000000000000" pitchFamily="65" charset="-120"/>
-                <a:ea typeface="標楷體" panose="03000509000000000000" pitchFamily="65" charset="-120"/>
-              </a:rPr>
-              <a:t>決策樹</a:t>
-            </a:r>
-            <a:r>
-              <a:rPr lang="en-US" altLang="zh-TW" dirty="0" smtClean="0">
-                <a:solidFill>
-                  <a:srgbClr val="0000FF"/>
-                </a:solidFill>
-                <a:latin typeface="標楷體" panose="03000509000000000000" pitchFamily="65" charset="-120"/>
-                <a:ea typeface="標楷體" panose="03000509000000000000" pitchFamily="65" charset="-120"/>
-              </a:rPr>
-              <a:t>(Decision) B.</a:t>
-            </a:r>
-            <a:r>
-              <a:rPr lang="zh-TW" altLang="en-US" dirty="0" smtClean="0">
-                <a:solidFill>
-                  <a:srgbClr val="0000FF"/>
-                </a:solidFill>
-                <a:latin typeface="標楷體" panose="03000509000000000000" pitchFamily="65" charset="-120"/>
-                <a:ea typeface="標楷體" panose="03000509000000000000" pitchFamily="65" charset="-120"/>
-              </a:rPr>
-              <a:t>隨機森林</a:t>
-            </a:r>
-            <a:r>
-              <a:rPr lang="en-US" altLang="zh-TW" dirty="0" smtClean="0">
-                <a:solidFill>
-                  <a:srgbClr val="0000FF"/>
-                </a:solidFill>
-                <a:latin typeface="標楷體" panose="03000509000000000000" pitchFamily="65" charset="-120"/>
-                <a:ea typeface="標楷體" panose="03000509000000000000" pitchFamily="65" charset="-120"/>
-              </a:rPr>
-              <a:t>(Random Forest)</a:t>
-            </a:r>
-            <a:r>
-              <a:rPr lang="zh-TW" altLang="en-US" dirty="0" smtClean="0">
-                <a:solidFill>
-                  <a:srgbClr val="0000FF"/>
-                </a:solidFill>
-                <a:latin typeface="標楷體" panose="03000509000000000000" pitchFamily="65" charset="-120"/>
-                <a:ea typeface="標楷體" panose="03000509000000000000" pitchFamily="65" charset="-120"/>
-              </a:rPr>
-              <a:t> </a:t>
-            </a:r>
-            <a:r>
-              <a:rPr lang="en-US" altLang="zh-TW" dirty="0" smtClean="0">
-                <a:latin typeface="標楷體" panose="03000509000000000000" pitchFamily="65" charset="-120"/>
-                <a:ea typeface="標楷體" panose="03000509000000000000" pitchFamily="65" charset="-120"/>
-              </a:rPr>
-              <a:t>C.</a:t>
-            </a:r>
-            <a:r>
-              <a:rPr lang="zh-TW" altLang="en-US" dirty="0">
-                <a:latin typeface="標楷體" panose="03000509000000000000" pitchFamily="65" charset="-120"/>
-                <a:ea typeface="標楷體" panose="03000509000000000000" pitchFamily="65" charset="-120"/>
-              </a:rPr>
-              <a:t>時間序列</a:t>
-            </a:r>
-            <a:r>
-              <a:rPr lang="zh-TW" altLang="en-US" dirty="0" smtClean="0">
-                <a:latin typeface="標楷體" panose="03000509000000000000" pitchFamily="65" charset="-120"/>
-                <a:ea typeface="標楷體" panose="03000509000000000000" pitchFamily="65" charset="-120"/>
-              </a:rPr>
-              <a:t>分析（</a:t>
-            </a:r>
-            <a:r>
-              <a:rPr lang="en-US" altLang="zh-TW" dirty="0" smtClean="0">
-                <a:latin typeface="標楷體" panose="03000509000000000000" pitchFamily="65" charset="-120"/>
-                <a:ea typeface="標楷體" panose="03000509000000000000" pitchFamily="65" charset="-120"/>
-              </a:rPr>
-              <a:t>Time </a:t>
-            </a:r>
-            <a:r>
-              <a:rPr lang="en-US" altLang="zh-TW" dirty="0">
-                <a:latin typeface="標楷體" panose="03000509000000000000" pitchFamily="65" charset="-120"/>
-                <a:ea typeface="標楷體" panose="03000509000000000000" pitchFamily="65" charset="-120"/>
-              </a:rPr>
-              <a:t>Series Forecasting</a:t>
-            </a:r>
-            <a:r>
-              <a:rPr lang="zh-TW" altLang="en-US" dirty="0" smtClean="0">
-                <a:latin typeface="標楷體" panose="03000509000000000000" pitchFamily="65" charset="-120"/>
-                <a:ea typeface="標楷體" panose="03000509000000000000" pitchFamily="65" charset="-120"/>
-              </a:rPr>
-              <a:t>）</a:t>
-            </a:r>
-            <a:endParaRPr lang="en-US" altLang="zh-TW" dirty="0" smtClean="0">
-              <a:latin typeface="標楷體" panose="03000509000000000000" pitchFamily="65" charset="-120"/>
-              <a:ea typeface="標楷體" panose="03000509000000000000" pitchFamily="65" charset="-120"/>
-            </a:endParaRPr>
-          </a:p>
-          <a:p>
-            <a:r>
-              <a:rPr lang="en-US" altLang="zh-TW" dirty="0" smtClean="0">
-                <a:latin typeface="標楷體" panose="03000509000000000000" pitchFamily="65" charset="-120"/>
-                <a:ea typeface="標楷體" panose="03000509000000000000" pitchFamily="65" charset="-120"/>
-              </a:rPr>
-              <a:t>D.</a:t>
-            </a:r>
-            <a:r>
-              <a:rPr lang="zh-TW" altLang="en-US" dirty="0">
-                <a:latin typeface="標楷體" panose="03000509000000000000" pitchFamily="65" charset="-120"/>
-                <a:ea typeface="標楷體" panose="03000509000000000000" pitchFamily="65" charset="-120"/>
-              </a:rPr>
-              <a:t>關聯</a:t>
-            </a:r>
-            <a:r>
-              <a:rPr lang="zh-TW" altLang="en-US" dirty="0" smtClean="0">
-                <a:latin typeface="標楷體" panose="03000509000000000000" pitchFamily="65" charset="-120"/>
-                <a:ea typeface="標楷體" panose="03000509000000000000" pitchFamily="65" charset="-120"/>
-              </a:rPr>
-              <a:t>分析（</a:t>
-            </a:r>
-            <a:r>
-              <a:rPr lang="en-US" altLang="zh-TW" dirty="0" smtClean="0">
-                <a:latin typeface="標楷體" panose="03000509000000000000" pitchFamily="65" charset="-120"/>
-                <a:ea typeface="標楷體" panose="03000509000000000000" pitchFamily="65" charset="-120"/>
-              </a:rPr>
-              <a:t>Association</a:t>
-            </a:r>
-            <a:r>
-              <a:rPr lang="zh-TW" altLang="en-US" dirty="0" smtClean="0">
-                <a:latin typeface="標楷體" panose="03000509000000000000" pitchFamily="65" charset="-120"/>
-                <a:ea typeface="標楷體" panose="03000509000000000000" pitchFamily="65" charset="-120"/>
-              </a:rPr>
-              <a:t>）</a:t>
-            </a:r>
-            <a:r>
-              <a:rPr lang="en-US" altLang="zh-TW" dirty="0" smtClean="0">
-                <a:latin typeface="標楷體" panose="03000509000000000000" pitchFamily="65" charset="-120"/>
-                <a:ea typeface="標楷體" panose="03000509000000000000" pitchFamily="65" charset="-120"/>
-              </a:rPr>
-              <a:t>E.</a:t>
-            </a:r>
-            <a:r>
-              <a:rPr lang="zh-TW" altLang="en-US" dirty="0">
-                <a:latin typeface="標楷體" panose="03000509000000000000" pitchFamily="65" charset="-120"/>
-                <a:ea typeface="標楷體" panose="03000509000000000000" pitchFamily="65" charset="-120"/>
-              </a:rPr>
-              <a:t>順序型態分析（</a:t>
-            </a:r>
-            <a:r>
-              <a:rPr lang="en-US" altLang="zh-TW" dirty="0">
-                <a:latin typeface="標楷體" panose="03000509000000000000" pitchFamily="65" charset="-120"/>
-                <a:ea typeface="標楷體" panose="03000509000000000000" pitchFamily="65" charset="-120"/>
-              </a:rPr>
-              <a:t>Sequential Pattern Analysis</a:t>
-            </a:r>
-            <a:r>
-              <a:rPr lang="zh-TW" altLang="en-US" dirty="0" smtClean="0">
-                <a:latin typeface="標楷體" panose="03000509000000000000" pitchFamily="65" charset="-120"/>
-                <a:ea typeface="標楷體" panose="03000509000000000000" pitchFamily="65" charset="-120"/>
-              </a:rPr>
-              <a:t>）</a:t>
-            </a:r>
-            <a:r>
-              <a:rPr lang="en-US" altLang="zh-TW" dirty="0">
-                <a:latin typeface="標楷體" panose="03000509000000000000" pitchFamily="65" charset="-120"/>
-                <a:ea typeface="標楷體" panose="03000509000000000000" pitchFamily="65" charset="-120"/>
-              </a:rPr>
-              <a:t> </a:t>
-            </a:r>
-            <a:endParaRPr lang="en-US" altLang="zh-TW" dirty="0" smtClean="0">
-              <a:latin typeface="標楷體" panose="03000509000000000000" pitchFamily="65" charset="-120"/>
-              <a:ea typeface="標楷體" panose="03000509000000000000" pitchFamily="65" charset="-120"/>
-            </a:endParaRPr>
-          </a:p>
-          <a:p>
-            <a:r>
-              <a:rPr lang="en-US" altLang="zh-TW" dirty="0" smtClean="0">
-                <a:solidFill>
-                  <a:srgbClr val="0000FF"/>
-                </a:solidFill>
-                <a:latin typeface="標楷體" panose="03000509000000000000" pitchFamily="65" charset="-120"/>
-                <a:ea typeface="標楷體" panose="03000509000000000000" pitchFamily="65" charset="-120"/>
-              </a:rPr>
-              <a:t>F.</a:t>
-            </a:r>
-            <a:r>
-              <a:rPr lang="zh-TW" altLang="en-US" dirty="0">
-                <a:solidFill>
-                  <a:srgbClr val="0000FF"/>
-                </a:solidFill>
-                <a:latin typeface="標楷體" panose="03000509000000000000" pitchFamily="65" charset="-120"/>
-                <a:ea typeface="標楷體" panose="03000509000000000000" pitchFamily="65" charset="-120"/>
-              </a:rPr>
-              <a:t>支援向量</a:t>
-            </a:r>
-            <a:r>
-              <a:rPr lang="zh-TW" altLang="en-US" dirty="0" smtClean="0">
-                <a:solidFill>
-                  <a:srgbClr val="0000FF"/>
-                </a:solidFill>
-                <a:latin typeface="標楷體" panose="03000509000000000000" pitchFamily="65" charset="-120"/>
-                <a:ea typeface="標楷體" panose="03000509000000000000" pitchFamily="65" charset="-120"/>
-              </a:rPr>
-              <a:t>機</a:t>
-            </a:r>
-            <a:r>
-              <a:rPr lang="en-US" altLang="zh-TW" dirty="0">
-                <a:solidFill>
-                  <a:srgbClr val="0000FF"/>
-                </a:solidFill>
-                <a:latin typeface="標楷體" panose="03000509000000000000" pitchFamily="65" charset="-120"/>
-                <a:ea typeface="標楷體" panose="03000509000000000000" pitchFamily="65" charset="-120"/>
-              </a:rPr>
-              <a:t>(support vector </a:t>
-            </a:r>
-            <a:r>
-              <a:rPr lang="en-US" altLang="zh-TW" dirty="0" smtClean="0">
-                <a:solidFill>
-                  <a:srgbClr val="0000FF"/>
-                </a:solidFill>
-                <a:latin typeface="標楷體" panose="03000509000000000000" pitchFamily="65" charset="-120"/>
-                <a:ea typeface="標楷體" panose="03000509000000000000" pitchFamily="65" charset="-120"/>
-              </a:rPr>
-              <a:t>machine)</a:t>
-            </a:r>
-            <a:r>
-              <a:rPr lang="zh-TW" altLang="en-US" dirty="0" smtClean="0">
-                <a:solidFill>
-                  <a:srgbClr val="0000FF"/>
-                </a:solidFill>
-                <a:latin typeface="標楷體" panose="03000509000000000000" pitchFamily="65" charset="-120"/>
-                <a:ea typeface="標楷體" panose="03000509000000000000" pitchFamily="65" charset="-120"/>
-              </a:rPr>
-              <a:t> </a:t>
-            </a:r>
-            <a:r>
-              <a:rPr lang="en-US" altLang="zh-TW" dirty="0" smtClean="0">
-                <a:solidFill>
-                  <a:srgbClr val="0000FF"/>
-                </a:solidFill>
-                <a:latin typeface="標楷體" panose="03000509000000000000" pitchFamily="65" charset="-120"/>
-                <a:ea typeface="標楷體" panose="03000509000000000000" pitchFamily="65" charset="-120"/>
-              </a:rPr>
-              <a:t>G.</a:t>
-            </a:r>
-            <a:r>
-              <a:rPr lang="zh-TW" altLang="en-US" dirty="0">
-                <a:solidFill>
-                  <a:srgbClr val="0000FF"/>
-                </a:solidFill>
-                <a:latin typeface="標楷體" panose="03000509000000000000" pitchFamily="65" charset="-120"/>
-                <a:ea typeface="標楷體" panose="03000509000000000000" pitchFamily="65" charset="-120"/>
-              </a:rPr>
-              <a:t>單純貝氏</a:t>
-            </a:r>
-            <a:r>
-              <a:rPr lang="zh-TW" altLang="en-US" dirty="0" smtClean="0">
-                <a:solidFill>
-                  <a:srgbClr val="0000FF"/>
-                </a:solidFill>
-                <a:latin typeface="標楷體" panose="03000509000000000000" pitchFamily="65" charset="-120"/>
-                <a:ea typeface="標楷體" panose="03000509000000000000" pitchFamily="65" charset="-120"/>
-              </a:rPr>
-              <a:t>演算法</a:t>
-            </a:r>
-            <a:r>
-              <a:rPr lang="en-US" altLang="zh-TW" dirty="0" smtClean="0">
-                <a:solidFill>
-                  <a:srgbClr val="0000FF"/>
-                </a:solidFill>
-                <a:latin typeface="標楷體" panose="03000509000000000000" pitchFamily="65" charset="-120"/>
-                <a:ea typeface="標楷體" panose="03000509000000000000" pitchFamily="65" charset="-120"/>
-              </a:rPr>
-              <a:t>(Naive </a:t>
-            </a:r>
-            <a:r>
-              <a:rPr lang="en-US" altLang="zh-TW" dirty="0">
-                <a:solidFill>
-                  <a:srgbClr val="0000FF"/>
-                </a:solidFill>
-                <a:latin typeface="標楷體" panose="03000509000000000000" pitchFamily="65" charset="-120"/>
-                <a:ea typeface="標楷體" panose="03000509000000000000" pitchFamily="65" charset="-120"/>
-              </a:rPr>
-              <a:t>Bayes Classifier</a:t>
-            </a:r>
-            <a:r>
-              <a:rPr lang="en-US" altLang="zh-TW" dirty="0" smtClean="0">
-                <a:solidFill>
-                  <a:srgbClr val="0000FF"/>
-                </a:solidFill>
-                <a:latin typeface="標楷體" panose="03000509000000000000" pitchFamily="65" charset="-120"/>
-                <a:ea typeface="標楷體" panose="03000509000000000000" pitchFamily="65" charset="-120"/>
-              </a:rPr>
-              <a:t>)</a:t>
-            </a:r>
-            <a:endParaRPr lang="zh-TW" altLang="en-US" dirty="0">
-              <a:solidFill>
-                <a:srgbClr val="0000FF"/>
               </a:solidFill>
               <a:latin typeface="標楷體" panose="03000509000000000000" pitchFamily="65" charset="-120"/>
               <a:ea typeface="標楷體" panose="03000509000000000000" pitchFamily="65" charset="-120"/>
@@ -5825,13 +5347,13 @@
         </p:nvSpPr>
         <p:spPr>
           <a:xfrm>
-            <a:off x="1217762" y="1846008"/>
-            <a:ext cx="10515600" cy="3982137"/>
+            <a:off x="1130298" y="1578154"/>
+            <a:ext cx="10515600" cy="4959387"/>
           </a:xfrm>
         </p:spPr>
         <p:txBody>
           <a:bodyPr>
-            <a:normAutofit fontScale="85000" lnSpcReduction="20000"/>
+            <a:normAutofit fontScale="70000" lnSpcReduction="20000"/>
           </a:bodyPr>
           <a:lstStyle/>
           <a:p>
@@ -5873,91 +5395,54 @@
                 <a:latin typeface="標楷體" panose="03000509000000000000" pitchFamily="65" charset="-120"/>
                 <a:ea typeface="標楷體" panose="03000509000000000000" pitchFamily="65" charset="-120"/>
               </a:rPr>
-              <a:t>Clustering</a:t>
-            </a:r>
-            <a:r>
-              <a:rPr lang="zh-TW" altLang="en-US" dirty="0" smtClean="0">
+              <a:t>Clustering , </a:t>
+            </a:r>
+            <a:r>
+              <a:rPr lang="zh-TW" altLang="en-US" dirty="0">
                 <a:solidFill>
                   <a:srgbClr val="0000FF"/>
                 </a:solidFill>
                 <a:latin typeface="標楷體" panose="03000509000000000000" pitchFamily="65" charset="-120"/>
                 <a:ea typeface="標楷體" panose="03000509000000000000" pitchFamily="65" charset="-120"/>
               </a:rPr>
-              <a:t>）</a:t>
-            </a:r>
-            <a:r>
-              <a:rPr lang="en-US" altLang="zh-TW" sz="2400" dirty="0" smtClean="0">
-                <a:latin typeface="標楷體" panose="03000509000000000000" pitchFamily="65" charset="-120"/>
-                <a:ea typeface="標楷體" panose="03000509000000000000" pitchFamily="65" charset="-120"/>
-              </a:rPr>
-              <a:t>(</a:t>
-            </a:r>
-            <a:r>
-              <a:rPr lang="zh-TW" altLang="en-US" sz="2400" dirty="0" smtClean="0">
-                <a:latin typeface="標楷體" panose="03000509000000000000" pitchFamily="65" charset="-120"/>
-                <a:ea typeface="標楷體" panose="03000509000000000000" pitchFamily="65" charset="-120"/>
-              </a:rPr>
-              <a:t>群集分析</a:t>
-            </a:r>
-            <a:r>
-              <a:rPr lang="en-US" altLang="zh-TW" sz="2400" dirty="0" smtClean="0">
-                <a:latin typeface="標楷體" panose="03000509000000000000" pitchFamily="65" charset="-120"/>
-                <a:ea typeface="標楷體" panose="03000509000000000000" pitchFamily="65" charset="-120"/>
-              </a:rPr>
-              <a:t>)</a:t>
-            </a:r>
-          </a:p>
-          <a:p>
-            <a:pPr lvl="1"/>
-            <a:r>
-              <a:rPr lang="zh-TW" altLang="en-US" dirty="0">
-                <a:latin typeface="標楷體" panose="03000509000000000000" pitchFamily="65" charset="-120"/>
-                <a:ea typeface="標楷體" panose="03000509000000000000" pitchFamily="65" charset="-120"/>
-              </a:rPr>
-              <a:t>均值聚類分析 </a:t>
-            </a:r>
-            <a:r>
-              <a:rPr lang="en-US" altLang="zh-TW" dirty="0">
-                <a:solidFill>
-                  <a:srgbClr val="FF0000"/>
-                </a:solidFill>
-                <a:latin typeface="標楷體" panose="03000509000000000000" pitchFamily="65" charset="-120"/>
-                <a:ea typeface="標楷體" panose="03000509000000000000" pitchFamily="65" charset="-120"/>
-              </a:rPr>
-              <a:t>(</a:t>
-            </a:r>
-            <a:r>
-              <a:rPr lang="en-US" altLang="zh-TW" dirty="0" smtClean="0">
-                <a:solidFill>
-                  <a:srgbClr val="FF0000"/>
-                </a:solidFill>
-                <a:latin typeface="標楷體" panose="03000509000000000000" pitchFamily="65" charset="-120"/>
-                <a:ea typeface="標楷體" panose="03000509000000000000" pitchFamily="65" charset="-120"/>
-              </a:rPr>
-              <a:t>K-means</a:t>
-            </a:r>
-            <a:r>
-              <a:rPr lang="en-US" altLang="zh-TW" dirty="0">
-                <a:solidFill>
-                  <a:srgbClr val="FF0000"/>
-                </a:solidFill>
-                <a:latin typeface="標楷體" panose="03000509000000000000" pitchFamily="65" charset="-120"/>
-                <a:ea typeface="標楷體" panose="03000509000000000000" pitchFamily="65" charset="-120"/>
-              </a:rPr>
-              <a:t>)</a:t>
-            </a:r>
-            <a:endParaRPr lang="zh-TW" altLang="en-US" dirty="0">
+              <a:t>非監督式學習）</a:t>
+            </a:r>
+            <a:endParaRPr lang="en-US" altLang="zh-TW" dirty="0">
               <a:solidFill>
-                <a:srgbClr val="FF0000"/>
+                <a:srgbClr val="0000FF"/>
               </a:solidFill>
               <a:latin typeface="標楷體" panose="03000509000000000000" pitchFamily="65" charset="-120"/>
               <a:ea typeface="標楷體" panose="03000509000000000000" pitchFamily="65" charset="-120"/>
             </a:endParaRPr>
           </a:p>
           <a:p>
+            <a:pPr lvl="1"/>
             <a:r>
               <a:rPr lang="zh-TW" altLang="en-US" dirty="0" smtClean="0">
                 <a:solidFill>
+                  <a:srgbClr val="FF0000"/>
+                </a:solidFill>
+                <a:latin typeface="標楷體" panose="03000509000000000000" pitchFamily="65" charset="-120"/>
+                <a:ea typeface="標楷體" panose="03000509000000000000" pitchFamily="65" charset="-120"/>
+              </a:rPr>
+              <a:t>均值聚類分析 </a:t>
+            </a:r>
+            <a:r>
+              <a:rPr lang="en-US" altLang="zh-TW" dirty="0" smtClean="0">
+                <a:latin typeface="標楷體" panose="03000509000000000000" pitchFamily="65" charset="-120"/>
+                <a:ea typeface="標楷體" panose="03000509000000000000" pitchFamily="65" charset="-120"/>
+              </a:rPr>
+              <a:t>(K-means)</a:t>
+            </a:r>
+            <a:endParaRPr lang="zh-TW" altLang="en-US" dirty="0" smtClean="0">
+              <a:latin typeface="標楷體" panose="03000509000000000000" pitchFamily="65" charset="-120"/>
+              <a:ea typeface="標楷體" panose="03000509000000000000" pitchFamily="65" charset="-120"/>
+            </a:endParaRPr>
+          </a:p>
+          <a:p>
+            <a:r>
+              <a:rPr lang="zh-TW" altLang="en-US" dirty="0" smtClean="0">
+                <a:solidFill>
                   <a:srgbClr val="0000FF"/>
                 </a:solidFill>
                 <a:latin typeface="標楷體" panose="03000509000000000000" pitchFamily="65" charset="-120"/>
@@ -5996,14 +5481,301 @@
               <a:t>Classification</a:t>
             </a:r>
             <a:r>
+              <a:rPr lang="zh-TW" altLang="en-US" dirty="0">
+                <a:solidFill>
+                  <a:srgbClr val="0000FF"/>
+                </a:solidFill>
+                <a:latin typeface="標楷體" panose="03000509000000000000" pitchFamily="65" charset="-120"/>
+                <a:ea typeface="標楷體" panose="03000509000000000000" pitchFamily="65" charset="-120"/>
+              </a:rPr>
+              <a:t> </a:t>
+            </a:r>
+            <a:r>
+              <a:rPr lang="en-US" altLang="zh-TW" dirty="0">
+                <a:solidFill>
+                  <a:srgbClr val="0000FF"/>
+                </a:solidFill>
+                <a:latin typeface="標楷體" panose="03000509000000000000" pitchFamily="65" charset="-120"/>
+                <a:ea typeface="標楷體" panose="03000509000000000000" pitchFamily="65" charset="-120"/>
+              </a:rPr>
+              <a:t>, </a:t>
+            </a:r>
+            <a:r>
+              <a:rPr lang="zh-TW" altLang="en-US" dirty="0">
+                <a:solidFill>
+                  <a:srgbClr val="0000FF"/>
+                </a:solidFill>
+                <a:latin typeface="標楷體" panose="03000509000000000000" pitchFamily="65" charset="-120"/>
+                <a:ea typeface="標楷體" panose="03000509000000000000" pitchFamily="65" charset="-120"/>
+              </a:rPr>
+              <a:t>監督式學習）</a:t>
+            </a:r>
+            <a:endParaRPr lang="en-US" altLang="zh-TW" dirty="0">
+              <a:solidFill>
+                <a:srgbClr val="0000FF"/>
+              </a:solidFill>
+              <a:latin typeface="標楷體" panose="03000509000000000000" pitchFamily="65" charset="-120"/>
+              <a:ea typeface="標楷體" panose="03000509000000000000" pitchFamily="65" charset="-120"/>
+            </a:endParaRPr>
+          </a:p>
+          <a:p>
+            <a:pPr lvl="1"/>
+            <a:r>
               <a:rPr lang="zh-TW" altLang="en-US" dirty="0" smtClean="0">
+                <a:latin typeface="標楷體" panose="03000509000000000000" pitchFamily="65" charset="-120"/>
+                <a:ea typeface="標楷體" panose="03000509000000000000" pitchFamily="65" charset="-120"/>
+              </a:rPr>
+              <a:t>大多數</a:t>
+            </a:r>
+            <a:r>
+              <a:rPr lang="zh-TW" altLang="en-US" u="sng" dirty="0">
+                <a:latin typeface="標楷體" panose="03000509000000000000" pitchFamily="65" charset="-120"/>
+                <a:ea typeface="標楷體" panose="03000509000000000000" pitchFamily="65" charset="-120"/>
+              </a:rPr>
+              <a:t>監督式學習</a:t>
+            </a:r>
+            <a:r>
+              <a:rPr lang="zh-TW" altLang="en-US" dirty="0">
+                <a:latin typeface="標楷體" panose="03000509000000000000" pitchFamily="65" charset="-120"/>
+                <a:ea typeface="標楷體" panose="03000509000000000000" pitchFamily="65" charset="-120"/>
+              </a:rPr>
+              <a:t>的演算法屬於分類或迴歸</a:t>
+            </a:r>
+            <a:endParaRPr lang="en-US" altLang="zh-TW" dirty="0">
+              <a:latin typeface="標楷體" panose="03000509000000000000" pitchFamily="65" charset="-120"/>
+              <a:ea typeface="標楷體" panose="03000509000000000000" pitchFamily="65" charset="-120"/>
+            </a:endParaRPr>
+          </a:p>
+          <a:p>
+            <a:pPr lvl="2"/>
+            <a:r>
+              <a:rPr lang="zh-TW" altLang="en-US" dirty="0" smtClean="0">
+                <a:solidFill>
+                  <a:srgbClr val="FF0000"/>
+                </a:solidFill>
+                <a:latin typeface="標楷體" panose="03000509000000000000" pitchFamily="65" charset="-120"/>
+                <a:ea typeface="標楷體" panose="03000509000000000000" pitchFamily="65" charset="-120"/>
+              </a:rPr>
+              <a:t>最近鄰居</a:t>
+            </a:r>
+            <a:r>
+              <a:rPr lang="en-US" altLang="zh-TW" dirty="0" smtClean="0">
+                <a:latin typeface="標楷體" panose="03000509000000000000" pitchFamily="65" charset="-120"/>
+                <a:ea typeface="標楷體" panose="03000509000000000000" pitchFamily="65" charset="-120"/>
+              </a:rPr>
+              <a:t>(</a:t>
+            </a:r>
+            <a:r>
+              <a:rPr lang="en-US" altLang="zh-TW" dirty="0">
+                <a:latin typeface="標楷體" panose="03000509000000000000" pitchFamily="65" charset="-120"/>
+                <a:ea typeface="標楷體" panose="03000509000000000000" pitchFamily="65" charset="-120"/>
+              </a:rPr>
+              <a:t>K-Nearest-Neighbor, KNN</a:t>
+            </a:r>
+            <a:r>
+              <a:rPr lang="en-US" altLang="zh-TW" dirty="0" smtClean="0">
+                <a:latin typeface="標楷體" panose="03000509000000000000" pitchFamily="65" charset="-120"/>
+                <a:ea typeface="標楷體" panose="03000509000000000000" pitchFamily="65" charset="-120"/>
+              </a:rPr>
+              <a:t>)</a:t>
+            </a:r>
+          </a:p>
+          <a:p>
+            <a:pPr lvl="2"/>
+            <a:r>
+              <a:rPr lang="zh-TW" altLang="en-US" dirty="0">
+                <a:latin typeface="標楷體" panose="03000509000000000000" pitchFamily="65" charset="-120"/>
+                <a:ea typeface="標楷體" panose="03000509000000000000" pitchFamily="65" charset="-120"/>
+              </a:rPr>
+              <a:t>決策樹</a:t>
+            </a:r>
+            <a:r>
+              <a:rPr lang="en-US" altLang="zh-TW" dirty="0">
+                <a:latin typeface="標楷體" panose="03000509000000000000" pitchFamily="65" charset="-120"/>
+                <a:ea typeface="標楷體" panose="03000509000000000000" pitchFamily="65" charset="-120"/>
+              </a:rPr>
+              <a:t>(</a:t>
+            </a:r>
+            <a:r>
+              <a:rPr lang="en-US" altLang="zh-TW" dirty="0" smtClean="0">
+                <a:latin typeface="標楷體" panose="03000509000000000000" pitchFamily="65" charset="-120"/>
+                <a:ea typeface="標楷體" panose="03000509000000000000" pitchFamily="65" charset="-120"/>
+              </a:rPr>
+              <a:t>Decision)</a:t>
+            </a:r>
+          </a:p>
+          <a:p>
+            <a:pPr lvl="2"/>
+            <a:r>
+              <a:rPr lang="zh-TW" altLang="en-US" dirty="0">
+                <a:latin typeface="標楷體" panose="03000509000000000000" pitchFamily="65" charset="-120"/>
+                <a:ea typeface="標楷體" panose="03000509000000000000" pitchFamily="65" charset="-120"/>
+              </a:rPr>
+              <a:t>隨機森林</a:t>
+            </a:r>
+            <a:r>
+              <a:rPr lang="en-US" altLang="zh-TW" dirty="0">
+                <a:latin typeface="標楷體" panose="03000509000000000000" pitchFamily="65" charset="-120"/>
+                <a:ea typeface="標楷體" panose="03000509000000000000" pitchFamily="65" charset="-120"/>
+              </a:rPr>
+              <a:t>(Random Forest</a:t>
+            </a:r>
+            <a:r>
+              <a:rPr lang="en-US" altLang="zh-TW" dirty="0" smtClean="0">
+                <a:latin typeface="標楷體" panose="03000509000000000000" pitchFamily="65" charset="-120"/>
+                <a:ea typeface="標楷體" panose="03000509000000000000" pitchFamily="65" charset="-120"/>
+              </a:rPr>
+              <a:t>)</a:t>
+            </a:r>
+          </a:p>
+          <a:p>
+            <a:pPr lvl="2"/>
+            <a:r>
+              <a:rPr lang="zh-TW" altLang="en-US" dirty="0">
+                <a:latin typeface="標楷體" panose="03000509000000000000" pitchFamily="65" charset="-120"/>
+                <a:ea typeface="標楷體" panose="03000509000000000000" pitchFamily="65" charset="-120"/>
+              </a:rPr>
+              <a:t>單純貝氏演算法</a:t>
+            </a:r>
+            <a:r>
+              <a:rPr lang="en-US" altLang="zh-TW" dirty="0">
+                <a:latin typeface="標楷體" panose="03000509000000000000" pitchFamily="65" charset="-120"/>
+                <a:ea typeface="標楷體" panose="03000509000000000000" pitchFamily="65" charset="-120"/>
+              </a:rPr>
+              <a:t>(Naive Bayes Classifier</a:t>
+            </a:r>
+            <a:r>
+              <a:rPr lang="en-US" altLang="zh-TW" dirty="0" smtClean="0">
+                <a:latin typeface="標楷體" panose="03000509000000000000" pitchFamily="65" charset="-120"/>
+                <a:ea typeface="標楷體" panose="03000509000000000000" pitchFamily="65" charset="-120"/>
+              </a:rPr>
+              <a:t>)</a:t>
+            </a:r>
+          </a:p>
+          <a:p>
+            <a:pPr lvl="2"/>
+            <a:r>
+              <a:rPr lang="zh-TW" altLang="en-US" dirty="0">
+                <a:latin typeface="標楷體" panose="03000509000000000000" pitchFamily="65" charset="-120"/>
+                <a:ea typeface="標楷體" panose="03000509000000000000" pitchFamily="65" charset="-120"/>
+              </a:rPr>
+              <a:t>支援向量機</a:t>
+            </a:r>
+            <a:r>
+              <a:rPr lang="en-US" altLang="zh-TW" dirty="0">
+                <a:latin typeface="標楷體" panose="03000509000000000000" pitchFamily="65" charset="-120"/>
+                <a:ea typeface="標楷體" panose="03000509000000000000" pitchFamily="65" charset="-120"/>
+              </a:rPr>
+              <a:t>(support vector machine</a:t>
+            </a:r>
+            <a:r>
+              <a:rPr lang="en-US" altLang="zh-TW" dirty="0" smtClean="0">
+                <a:latin typeface="標楷體" panose="03000509000000000000" pitchFamily="65" charset="-120"/>
+                <a:ea typeface="標楷體" panose="03000509000000000000" pitchFamily="65" charset="-120"/>
+              </a:rPr>
+              <a:t>)</a:t>
+            </a:r>
+          </a:p>
+          <a:p>
+            <a:pPr lvl="2"/>
+            <a:r>
+              <a:rPr lang="zh-TW" altLang="en-US" dirty="0">
+                <a:latin typeface="標楷體" panose="03000509000000000000" pitchFamily="65" charset="-120"/>
+                <a:ea typeface="標楷體" panose="03000509000000000000" pitchFamily="65" charset="-120"/>
+              </a:rPr>
+              <a:t>邏輯迴</a:t>
+            </a:r>
+            <a:r>
+              <a:rPr lang="zh-TW" altLang="en-US" dirty="0" smtClean="0">
+                <a:latin typeface="標楷體" panose="03000509000000000000" pitchFamily="65" charset="-120"/>
+                <a:ea typeface="標楷體" panose="03000509000000000000" pitchFamily="65" charset="-120"/>
+              </a:rPr>
+              <a:t>歸</a:t>
+            </a:r>
+            <a:r>
+              <a:rPr lang="zh-TW" altLang="en-US" sz="2100" dirty="0" smtClean="0">
+                <a:latin typeface="標楷體" panose="03000509000000000000" pitchFamily="65" charset="-120"/>
+                <a:ea typeface="標楷體" panose="03000509000000000000" pitchFamily="65" charset="-120"/>
+              </a:rPr>
+              <a:t>（</a:t>
+            </a:r>
+            <a:r>
+              <a:rPr lang="en-US" altLang="zh-TW" sz="2100" dirty="0">
+                <a:latin typeface="標楷體" panose="03000509000000000000" pitchFamily="65" charset="-120"/>
+                <a:ea typeface="標楷體" panose="03000509000000000000" pitchFamily="65" charset="-120"/>
+              </a:rPr>
+              <a:t>Logistic Regression</a:t>
+            </a:r>
+            <a:r>
+              <a:rPr lang="zh-TW" altLang="en-US" sz="2100" dirty="0">
+                <a:latin typeface="標楷體" panose="03000509000000000000" pitchFamily="65" charset="-120"/>
+                <a:ea typeface="標楷體" panose="03000509000000000000" pitchFamily="65" charset="-120"/>
+              </a:rPr>
+              <a:t>）雖名為迴歸</a:t>
+            </a:r>
+            <a:r>
+              <a:rPr lang="zh-TW" altLang="en-US" sz="2100" dirty="0" smtClean="0">
+                <a:latin typeface="標楷體" panose="03000509000000000000" pitchFamily="65" charset="-120"/>
+                <a:ea typeface="標楷體" panose="03000509000000000000" pitchFamily="65" charset="-120"/>
+              </a:rPr>
+              <a:t>，</a:t>
+            </a:r>
+            <a:endParaRPr lang="en-US" altLang="zh-TW" sz="2100" dirty="0" smtClean="0">
+              <a:latin typeface="標楷體" panose="03000509000000000000" pitchFamily="65" charset="-120"/>
+              <a:ea typeface="標楷體" panose="03000509000000000000" pitchFamily="65" charset="-120"/>
+            </a:endParaRPr>
+          </a:p>
+          <a:p>
+            <a:pPr lvl="3"/>
+            <a:r>
+              <a:rPr lang="zh-TW" altLang="en-US" sz="1900" dirty="0" smtClean="0">
+                <a:latin typeface="標楷體" panose="03000509000000000000" pitchFamily="65" charset="-120"/>
+                <a:ea typeface="標楷體" panose="03000509000000000000" pitchFamily="65" charset="-120"/>
+              </a:rPr>
+              <a:t>實際上</a:t>
+            </a:r>
+            <a:r>
+              <a:rPr lang="zh-TW" altLang="en-US" sz="1900" dirty="0">
+                <a:latin typeface="標楷體" panose="03000509000000000000" pitchFamily="65" charset="-120"/>
+                <a:ea typeface="標楷體" panose="03000509000000000000" pitchFamily="65" charset="-120"/>
+              </a:rPr>
+              <a:t>是一種常用於二元或多元分類的演算法技術</a:t>
+            </a:r>
+            <a:endParaRPr lang="en-US" altLang="zh-TW" sz="1900" dirty="0">
+              <a:latin typeface="標楷體" panose="03000509000000000000" pitchFamily="65" charset="-120"/>
+              <a:ea typeface="標楷體" panose="03000509000000000000" pitchFamily="65" charset="-120"/>
+            </a:endParaRPr>
+          </a:p>
+          <a:p>
+            <a:r>
+              <a:rPr lang="zh-TW" altLang="en-US" dirty="0" smtClean="0">
                 <a:solidFill>
                   <a:srgbClr val="0000FF"/>
                 </a:solidFill>
                 <a:latin typeface="標楷體" panose="03000509000000000000" pitchFamily="65" charset="-120"/>
                 <a:ea typeface="標楷體" panose="03000509000000000000" pitchFamily="65" charset="-120"/>
               </a:rPr>
-              <a:t>）</a:t>
+              <a:t>三</a:t>
+            </a:r>
+            <a:r>
+              <a:rPr lang="en-US" altLang="zh-TW" dirty="0" smtClean="0">
+                <a:solidFill>
+                  <a:srgbClr val="0000FF"/>
+                </a:solidFill>
+                <a:latin typeface="標楷體" panose="03000509000000000000" pitchFamily="65" charset="-120"/>
+                <a:ea typeface="標楷體" panose="03000509000000000000" pitchFamily="65" charset="-120"/>
+              </a:rPr>
+              <a:t>.</a:t>
+            </a:r>
+            <a:r>
+              <a:rPr lang="zh-TW" altLang="en-US" dirty="0" smtClean="0">
+                <a:solidFill>
+                  <a:srgbClr val="0000FF"/>
+                </a:solidFill>
+                <a:latin typeface="標楷體" panose="03000509000000000000" pitchFamily="65" charset="-120"/>
+                <a:ea typeface="標楷體" panose="03000509000000000000" pitchFamily="65" charset="-120"/>
+              </a:rPr>
+              <a:t>預測連續數值</a:t>
             </a:r>
             <a:endParaRPr lang="en-US" altLang="zh-TW" dirty="0" smtClean="0">
               <a:solidFill>
@@ -6016,11 +5788,91 @@
           <a:p>
             <a:pPr lvl="1"/>
             <a:r>
+              <a:rPr lang="zh-TW" altLang="en-US" dirty="0" smtClean="0">
+                <a:latin typeface="標楷體" panose="03000509000000000000" pitchFamily="65" charset="-120"/>
+                <a:ea typeface="標楷體" panose="03000509000000000000" pitchFamily="65" charset="-120"/>
+              </a:rPr>
+              <a:t>迴</a:t>
+            </a:r>
+            <a:r>
+              <a:rPr lang="zh-TW" altLang="en-US" sz="2500" dirty="0" smtClean="0">
+                <a:latin typeface="標楷體" panose="03000509000000000000" pitchFamily="65" charset="-120"/>
+                <a:ea typeface="標楷體" panose="03000509000000000000" pitchFamily="65" charset="-120"/>
+              </a:rPr>
+              <a:t>歸</a:t>
+            </a:r>
+            <a:r>
+              <a:rPr lang="en-US" altLang="zh-TW" sz="2500" dirty="0" smtClean="0">
+                <a:latin typeface="標楷體" panose="03000509000000000000" pitchFamily="65" charset="-120"/>
+                <a:ea typeface="標楷體" panose="03000509000000000000" pitchFamily="65" charset="-120"/>
+              </a:rPr>
+              <a:t>(regression</a:t>
+            </a:r>
+            <a:r>
+              <a:rPr lang="zh-TW" altLang="en-US" sz="2800" dirty="0"/>
+              <a:t> </a:t>
+            </a:r>
+            <a:r>
+              <a:rPr lang="en-US" altLang="zh-TW" sz="2500" dirty="0">
+                <a:latin typeface="標楷體" panose="03000509000000000000" pitchFamily="65" charset="-120"/>
+                <a:ea typeface="標楷體" panose="03000509000000000000" pitchFamily="65" charset="-120"/>
+              </a:rPr>
+              <a:t>, </a:t>
+            </a:r>
+            <a:r>
+              <a:rPr lang="zh-TW" altLang="en-US" sz="2500" dirty="0">
+                <a:latin typeface="標楷體" panose="03000509000000000000" pitchFamily="65" charset="-120"/>
+                <a:ea typeface="標楷體" panose="03000509000000000000" pitchFamily="65" charset="-120"/>
+              </a:rPr>
+              <a:t>監督式學習</a:t>
+            </a:r>
+            <a:r>
+              <a:rPr lang="en-US" altLang="zh-TW" sz="2500" dirty="0">
+                <a:latin typeface="標楷體" panose="03000509000000000000" pitchFamily="65" charset="-120"/>
+                <a:ea typeface="標楷體" panose="03000509000000000000" pitchFamily="65" charset="-120"/>
+              </a:rPr>
+              <a:t>)</a:t>
+            </a:r>
+          </a:p>
+          <a:p>
+            <a:pPr lvl="2"/>
+            <a:r>
               <a:rPr lang="zh-TW" altLang="en-US" dirty="0">
                 <a:latin typeface="標楷體" panose="03000509000000000000" pitchFamily="65" charset="-120"/>
                 <a:ea typeface="標楷體" panose="03000509000000000000" pitchFamily="65" charset="-120"/>
               </a:rPr>
-              <a:t>很多機器學習的演算法都是</a:t>
+              <a:t>傳統的迴歸分析適用在因變數是連續變數的</a:t>
+            </a:r>
+            <a:r>
+              <a:rPr lang="zh-TW" altLang="en-US" dirty="0" smtClean="0">
+                <a:latin typeface="標楷體" panose="03000509000000000000" pitchFamily="65" charset="-120"/>
+                <a:ea typeface="標楷體" panose="03000509000000000000" pitchFamily="65" charset="-120"/>
+              </a:rPr>
+              <a:t>情形</a:t>
+            </a:r>
+            <a:r>
+              <a:rPr lang="en-US" altLang="zh-TW" dirty="0" smtClean="0">
+                <a:latin typeface="標楷體" panose="03000509000000000000" pitchFamily="65" charset="-120"/>
+                <a:ea typeface="標楷體" panose="03000509000000000000" pitchFamily="65" charset="-120"/>
+              </a:rPr>
+              <a:t>,</a:t>
+            </a:r>
+          </a:p>
+          <a:p>
+            <a:pPr lvl="2"/>
+            <a:r>
+              <a:rPr lang="zh-TW" altLang="en-US" dirty="0" smtClean="0">
+                <a:latin typeface="標楷體" panose="03000509000000000000" pitchFamily="65" charset="-120"/>
+                <a:ea typeface="標楷體" panose="03000509000000000000" pitchFamily="65" charset="-120"/>
+              </a:rPr>
+              <a:t>通常</a:t>
+            </a:r>
+            <a:r>
+              <a:rPr lang="zh-TW" altLang="en-US" dirty="0">
+                <a:latin typeface="標楷體" panose="03000509000000000000" pitchFamily="65" charset="-120"/>
+                <a:ea typeface="標楷體" panose="03000509000000000000" pitchFamily="65" charset="-120"/>
+              </a:rPr>
+              <a:t>用於預測連續數值，例如房價、氣溫</a:t>
             </a:r>
             <a:endParaRPr lang="en-US" altLang="zh-TW" dirty="0">
               <a:latin typeface="標楷體" panose="03000509000000000000" pitchFamily="65" charset="-120"/>
@@ -6028,282 +5880,188 @@
             </a:endParaRPr>
           </a:p>
           <a:p>
-            <a:pPr lvl="2"/>
             <a:r>
               <a:rPr lang="zh-TW" altLang="en-US" dirty="0" smtClean="0">
-                <a:latin typeface="標楷體" panose="03000509000000000000" pitchFamily="65" charset="-120"/>
-                <a:ea typeface="標楷體" panose="03000509000000000000" pitchFamily="65" charset="-120"/>
-              </a:rPr>
-              <a:t>最近</a:t>
+                <a:solidFill>
+                  <a:srgbClr val="0000FF"/>
+                </a:solidFill>
+                <a:latin typeface="標楷體" panose="03000509000000000000" pitchFamily="65" charset="-120"/>
+                <a:ea typeface="標楷體" panose="03000509000000000000" pitchFamily="65" charset="-120"/>
+              </a:rPr>
+              <a:t>四</a:t>
+            </a:r>
+            <a:r>
+              <a:rPr lang="en-US" altLang="zh-TW" dirty="0" smtClean="0">
+                <a:solidFill>
+                  <a:srgbClr val="0000FF"/>
+                </a:solidFill>
+                <a:latin typeface="標楷體" panose="03000509000000000000" pitchFamily="65" charset="-120"/>
+                <a:ea typeface="標楷體" panose="03000509000000000000" pitchFamily="65" charset="-120"/>
+              </a:rPr>
+              <a:t>.</a:t>
             </a:r>
             <a:r>
               <a:rPr lang="zh-TW" altLang="en-US" dirty="0">
-                <a:latin typeface="標楷體" panose="03000509000000000000" pitchFamily="65" charset="-120"/>
-                <a:ea typeface="標楷體" panose="03000509000000000000" pitchFamily="65" charset="-120"/>
-              </a:rPr>
-              <a:t>鄰居 </a:t>
+                <a:solidFill>
+                  <a:srgbClr val="0000FF"/>
+                </a:solidFill>
+                <a:latin typeface="標楷體" panose="03000509000000000000" pitchFamily="65" charset="-120"/>
+                <a:ea typeface="標楷體" panose="03000509000000000000" pitchFamily="65" charset="-120"/>
+              </a:rPr>
+              <a:t>關聯分析（</a:t>
+            </a:r>
+            <a:r>
+              <a:rPr lang="en-US" altLang="zh-TW" dirty="0" smtClean="0">
+                <a:solidFill>
+                  <a:srgbClr val="0000FF"/>
+                </a:solidFill>
+                <a:latin typeface="標楷體" panose="03000509000000000000" pitchFamily="65" charset="-120"/>
+                <a:ea typeface="標楷體" panose="03000509000000000000" pitchFamily="65" charset="-120"/>
+              </a:rPr>
+              <a:t>Association</a:t>
+            </a:r>
+            <a:r>
+              <a:rPr lang="zh-TW" altLang="en-US" dirty="0"/>
+              <a:t> </a:t>
             </a:r>
             <a:r>
               <a:rPr lang="en-US" altLang="zh-TW" dirty="0">
-                <a:latin typeface="標楷體" panose="03000509000000000000" pitchFamily="65" charset="-120"/>
-                <a:ea typeface="標楷體" panose="03000509000000000000" pitchFamily="65" charset="-120"/>
-              </a:rPr>
-              <a:t>(K-Nearest-Neighbor</a:t>
+                <a:solidFill>
+                  <a:srgbClr val="0000FF"/>
+                </a:solidFill>
+                <a:latin typeface="標楷體" panose="03000509000000000000" pitchFamily="65" charset="-120"/>
+                <a:ea typeface="標楷體" panose="03000509000000000000" pitchFamily="65" charset="-120"/>
+              </a:rPr>
+              <a:t>, </a:t>
+            </a:r>
+            <a:r>
+              <a:rPr lang="zh-TW" altLang="en-US" dirty="0">
+                <a:solidFill>
+                  <a:srgbClr val="0000FF"/>
+                </a:solidFill>
+                <a:latin typeface="標楷體" panose="03000509000000000000" pitchFamily="65" charset="-120"/>
+                <a:ea typeface="標楷體" panose="03000509000000000000" pitchFamily="65" charset="-120"/>
+              </a:rPr>
+              <a:t>非監督式學習</a:t>
+            </a:r>
+            <a:r>
+              <a:rPr lang="en-US" altLang="zh-TW" dirty="0" smtClean="0">
+                <a:solidFill>
+                  <a:srgbClr val="0000FF"/>
+                </a:solidFill>
+                <a:latin typeface="標楷體" panose="03000509000000000000" pitchFamily="65" charset="-120"/>
+                <a:ea typeface="標楷體" panose="03000509000000000000" pitchFamily="65" charset="-120"/>
+              </a:rPr>
+              <a:t>)</a:t>
+            </a:r>
+          </a:p>
+          <a:p>
+            <a:r>
+              <a:rPr lang="zh-TW" altLang="en-US" dirty="0" smtClean="0">
+                <a:solidFill>
+                  <a:srgbClr val="0000FF"/>
+                </a:solidFill>
+                <a:latin typeface="標楷體" panose="03000509000000000000" pitchFamily="65" charset="-120"/>
+                <a:ea typeface="標楷體" panose="03000509000000000000" pitchFamily="65" charset="-120"/>
+              </a:rPr>
+              <a:t>五</a:t>
+            </a:r>
+            <a:r>
+              <a:rPr lang="en-US" altLang="zh-TW" dirty="0" smtClean="0">
+                <a:solidFill>
+                  <a:srgbClr val="0000FF"/>
+                </a:solidFill>
+                <a:latin typeface="標楷體" panose="03000509000000000000" pitchFamily="65" charset="-120"/>
+                <a:ea typeface="標楷體" panose="03000509000000000000" pitchFamily="65" charset="-120"/>
+              </a:rPr>
+              <a:t>.</a:t>
+            </a:r>
+            <a:r>
+              <a:rPr lang="zh-TW" altLang="en-US" dirty="0">
+                <a:solidFill>
+                  <a:srgbClr val="0000FF"/>
+                </a:solidFill>
+                <a:latin typeface="標楷體" panose="03000509000000000000" pitchFamily="65" charset="-120"/>
+                <a:ea typeface="標楷體" panose="03000509000000000000" pitchFamily="65" charset="-120"/>
+              </a:rPr>
+              <a:t>時間序列分析（</a:t>
             </a:r>
             <a:r>
               <a:rPr lang="en-US" altLang="zh-TW" dirty="0">
                 <a:solidFill>
-                  <a:srgbClr val="FF0000"/>
-                </a:solidFill>
-                <a:latin typeface="標楷體" panose="03000509000000000000" pitchFamily="65" charset="-120"/>
-                <a:ea typeface="標楷體" panose="03000509000000000000" pitchFamily="65" charset="-120"/>
-              </a:rPr>
-              <a:t>, KNN</a:t>
+                  <a:srgbClr val="0000FF"/>
+                </a:solidFill>
+                <a:latin typeface="標楷體" panose="03000509000000000000" pitchFamily="65" charset="-120"/>
+                <a:ea typeface="標楷體" panose="03000509000000000000" pitchFamily="65" charset="-120"/>
+              </a:rPr>
+              <a:t>Time Series </a:t>
             </a:r>
             <a:r>
               <a:rPr lang="en-US" altLang="zh-TW" dirty="0" smtClean="0">
-                <a:latin typeface="標楷體" panose="03000509000000000000" pitchFamily="65" charset="-120"/>
-                <a:ea typeface="標楷體" panose="03000509000000000000" pitchFamily="65" charset="-120"/>
-              </a:rPr>
-              <a:t>)</a:t>
-            </a:r>
-          </a:p>
-          <a:p>
-            <a:pPr lvl="1"/>
+                <a:solidFill>
+                  <a:srgbClr val="0000FF"/>
+                </a:solidFill>
+                <a:latin typeface="標楷體" panose="03000509000000000000" pitchFamily="65" charset="-120"/>
+                <a:ea typeface="標楷體" panose="03000509000000000000" pitchFamily="65" charset="-120"/>
+              </a:rPr>
+              <a:t>Forecasting)</a:t>
+            </a:r>
+          </a:p>
+          <a:p>
             <a:r>
               <a:rPr lang="zh-TW" altLang="en-US" dirty="0" smtClean="0">
-                <a:latin typeface="標楷體" panose="03000509000000000000" pitchFamily="65" charset="-120"/>
-                <a:ea typeface="標楷體" panose="03000509000000000000" pitchFamily="65" charset="-120"/>
-              </a:rPr>
-              <a:t>類</a:t>
-            </a:r>
-            <a:r>
-              <a:rPr lang="zh-TW" altLang="en-US" dirty="0">
-                <a:latin typeface="標楷體" panose="03000509000000000000" pitchFamily="65" charset="-120"/>
-                <a:ea typeface="標楷體" panose="03000509000000000000" pitchFamily="65" charset="-120"/>
-              </a:rPr>
-              <a:t>神經網路 </a:t>
-            </a:r>
-            <a:r>
-              <a:rPr lang="en-US" altLang="zh-TW" dirty="0">
-                <a:latin typeface="標楷體" panose="03000509000000000000" pitchFamily="65" charset="-120"/>
-                <a:ea typeface="標楷體" panose="03000509000000000000" pitchFamily="65" charset="-120"/>
-              </a:rPr>
-              <a:t>(Neural </a:t>
-            </a:r>
-            <a:r>
-              <a:rPr lang="en-US" altLang="zh-TW" dirty="0" err="1">
-                <a:latin typeface="標楷體" panose="03000509000000000000" pitchFamily="65" charset="-120"/>
-                <a:ea typeface="標楷體" panose="03000509000000000000" pitchFamily="65" charset="-120"/>
-              </a:rPr>
-              <a:t>Network,NN</a:t>
+                <a:solidFill>
+                  <a:srgbClr val="0000FF"/>
+                </a:solidFill>
+                <a:latin typeface="標楷體" panose="03000509000000000000" pitchFamily="65" charset="-120"/>
+                <a:ea typeface="標楷體" panose="03000509000000000000" pitchFamily="65" charset="-120"/>
+              </a:rPr>
+              <a:t>六</a:t>
             </a:r>
             <a:r>
               <a:rPr lang="en-US" altLang="zh-TW" dirty="0" smtClean="0">
-                <a:latin typeface="標楷體" panose="03000509000000000000" pitchFamily="65" charset="-120"/>
-                <a:ea typeface="標楷體" panose="03000509000000000000" pitchFamily="65" charset="-120"/>
-              </a:rPr>
-              <a:t>)</a:t>
-            </a:r>
-          </a:p>
-          <a:p>
-            <a:pPr lvl="2"/>
-            <a:r>
-              <a:rPr lang="zh-TW" altLang="en-US" dirty="0" smtClean="0">
-                <a:latin typeface="標楷體" panose="03000509000000000000" pitchFamily="65" charset="-120"/>
-                <a:ea typeface="標楷體" panose="03000509000000000000" pitchFamily="65" charset="-120"/>
-              </a:rPr>
-              <a:t>感知機</a:t>
-            </a:r>
-            <a:r>
-              <a:rPr lang="en-US" altLang="zh-TW" dirty="0" smtClean="0">
-                <a:latin typeface="標楷體" panose="03000509000000000000" pitchFamily="65" charset="-120"/>
-                <a:ea typeface="標楷體" panose="03000509000000000000" pitchFamily="65" charset="-120"/>
-              </a:rPr>
-              <a:t>Perceptron (MLP)</a:t>
-            </a:r>
-          </a:p>
-          <a:p>
-            <a:pPr lvl="2"/>
-            <a:r>
-              <a:rPr lang="zh-TW" altLang="en-US" dirty="0" smtClean="0">
-                <a:solidFill>
-                  <a:srgbClr val="FF0000"/>
-                </a:solidFill>
-                <a:latin typeface="標楷體" panose="03000509000000000000" pitchFamily="65" charset="-120"/>
-                <a:ea typeface="標楷體" panose="03000509000000000000" pitchFamily="65" charset="-120"/>
-              </a:rPr>
-              <a:t>類神經網路</a:t>
-            </a:r>
-            <a:r>
-              <a:rPr lang="zh-TW" altLang="en-US" dirty="0" smtClean="0">
-                <a:latin typeface="標楷體" panose="03000509000000000000" pitchFamily="65" charset="-120"/>
-                <a:ea typeface="標楷體" panose="03000509000000000000" pitchFamily="65" charset="-120"/>
-              </a:rPr>
-              <a:t> </a:t>
-            </a:r>
-            <a:r>
-              <a:rPr lang="en-US" altLang="zh-TW" dirty="0" smtClean="0">
-                <a:latin typeface="標楷體" panose="03000509000000000000" pitchFamily="65" charset="-120"/>
-                <a:ea typeface="標楷體" panose="03000509000000000000" pitchFamily="65" charset="-120"/>
-              </a:rPr>
-              <a:t>(NN, ANN, DNN)</a:t>
-            </a:r>
-            <a:endParaRPr lang="en-US" altLang="zh-TW" dirty="0">
-              <a:latin typeface="標楷體" panose="03000509000000000000" pitchFamily="65" charset="-120"/>
-              <a:ea typeface="標楷體" panose="03000509000000000000" pitchFamily="65" charset="-120"/>
-            </a:endParaRPr>
-          </a:p>
-          <a:p>
-            <a:pPr lvl="2"/>
-            <a:r>
-              <a:rPr lang="zh-TW" altLang="en-US" dirty="0">
-                <a:latin typeface="標楷體" panose="03000509000000000000" pitchFamily="65" charset="-120"/>
-                <a:ea typeface="標楷體" panose="03000509000000000000" pitchFamily="65" charset="-120"/>
-              </a:rPr>
-              <a:t>卷積神經網路 </a:t>
-            </a:r>
-            <a:r>
-              <a:rPr lang="en-US" altLang="zh-TW" dirty="0">
-                <a:latin typeface="標楷體" panose="03000509000000000000" pitchFamily="65" charset="-120"/>
-                <a:ea typeface="標楷體" panose="03000509000000000000" pitchFamily="65" charset="-120"/>
-              </a:rPr>
-              <a:t>(Convolution Neural </a:t>
-            </a:r>
-            <a:r>
-              <a:rPr lang="en-US" altLang="zh-TW" dirty="0" err="1">
-                <a:latin typeface="標楷體" panose="03000509000000000000" pitchFamily="65" charset="-120"/>
-                <a:ea typeface="標楷體" panose="03000509000000000000" pitchFamily="65" charset="-120"/>
-              </a:rPr>
-              <a:t>Network,CNN</a:t>
-            </a:r>
-            <a:r>
-              <a:rPr lang="en-US" altLang="zh-TW" dirty="0" smtClean="0">
-                <a:latin typeface="標楷體" panose="03000509000000000000" pitchFamily="65" charset="-120"/>
-                <a:ea typeface="標楷體" panose="03000509000000000000" pitchFamily="65" charset="-120"/>
-              </a:rPr>
-              <a:t>)</a:t>
-            </a:r>
-          </a:p>
-          <a:p>
-            <a:r>
-              <a:rPr lang="zh-TW" altLang="en-US" dirty="0" smtClean="0">
                 <a:solidFill>
                   <a:srgbClr val="0000FF"/>
                 </a:solidFill>
                 <a:latin typeface="標楷體" panose="03000509000000000000" pitchFamily="65" charset="-120"/>
                 <a:ea typeface="標楷體" panose="03000509000000000000" pitchFamily="65" charset="-120"/>
               </a:rPr>
-              <a:t>三</a:t>
-            </a:r>
-            <a:r>
-              <a:rPr lang="en-US" altLang="zh-TW" dirty="0" smtClean="0">
+              <a:t>.</a:t>
+            </a:r>
+            <a:r>
+              <a:rPr lang="zh-TW" altLang="en-US" i="1" u="sng" dirty="0">
                 <a:solidFill>
                   <a:srgbClr val="0000FF"/>
                 </a:solidFill>
                 <a:latin typeface="標楷體" panose="03000509000000000000" pitchFamily="65" charset="-120"/>
                 <a:ea typeface="標楷體" panose="03000509000000000000" pitchFamily="65" charset="-120"/>
               </a:rPr>
-              <a:t>.</a:t>
-            </a:r>
-            <a:r>
-              <a:rPr lang="zh-TW" altLang="en-US" dirty="0" smtClean="0">
+              <a:t>強化學習（</a:t>
+            </a:r>
+            <a:r>
+              <a:rPr lang="en-US" altLang="zh-TW" i="1" u="sng" dirty="0">
                 <a:solidFill>
                   <a:srgbClr val="0000FF"/>
                 </a:solidFill>
                 <a:latin typeface="標楷體" panose="03000509000000000000" pitchFamily="65" charset="-120"/>
                 <a:ea typeface="標楷體" panose="03000509000000000000" pitchFamily="65" charset="-120"/>
               </a:rPr>
-              <a:t>預測連續數值</a:t>
-            </a:r>
-            <a:endParaRPr lang="en-US" altLang="zh-TW" dirty="0" smtClean="0">
+              <a:t>Reinforcement Learning</a:t>
+            </a:r>
+            <a:r>
+              <a:rPr lang="zh-TW" altLang="en-US" i="1" u="sng" dirty="0">
+                <a:solidFill>
+                  <a:srgbClr val="0000FF"/>
+                </a:solidFill>
+                <a:latin typeface="標楷體" panose="03000509000000000000" pitchFamily="65" charset="-120"/>
+                <a:ea typeface="標楷體" panose="03000509000000000000" pitchFamily="65" charset="-120"/>
+              </a:rPr>
+              <a:t>）</a:t>
+            </a:r>
+            <a:endParaRPr lang="en-US" altLang="zh-TW" i="1" u="sng" dirty="0">
               <a:solidFill>
                 <a:srgbClr val="0000FF"/>
               </a:solidFill>
-              <a:latin typeface="標楷體" panose="03000509000000000000" pitchFamily="65" charset="-120"/>
-              <a:ea typeface="標楷體" panose="03000509000000000000" pitchFamily="65" charset="-120"/>
-            </a:endParaRPr>
-          </a:p>
-          <a:p>
-            <a:pPr lvl="1"/>
-            <a:r>
-              <a:rPr lang="zh-TW" altLang="en-US" dirty="0" smtClean="0">
-                <a:latin typeface="標楷體" panose="03000509000000000000" pitchFamily="65" charset="-120"/>
-                <a:ea typeface="標楷體" panose="03000509000000000000" pitchFamily="65" charset="-120"/>
-              </a:rPr>
-              <a:t>線性迴歸</a:t>
-            </a:r>
-            <a:endParaRPr lang="en-US" altLang="zh-TW" dirty="0" smtClean="0">
-              <a:latin typeface="標楷體" panose="03000509000000000000" pitchFamily="65" charset="-120"/>
-              <a:ea typeface="標楷體" panose="03000509000000000000" pitchFamily="65" charset="-120"/>
-            </a:endParaRPr>
-          </a:p>
-          <a:p>
-            <a:pPr lvl="2"/>
-            <a:r>
-              <a:rPr lang="zh-TW" altLang="en-US" dirty="0">
-                <a:latin typeface="標楷體" panose="03000509000000000000" pitchFamily="65" charset="-120"/>
-                <a:ea typeface="標楷體" panose="03000509000000000000" pitchFamily="65" charset="-120"/>
-              </a:rPr>
-              <a:t>傳統的迴歸分析適用在因變數是連續變數的</a:t>
-            </a:r>
-            <a:r>
-              <a:rPr lang="zh-TW" altLang="en-US" dirty="0" smtClean="0">
-                <a:latin typeface="標楷體" panose="03000509000000000000" pitchFamily="65" charset="-120"/>
-                <a:ea typeface="標楷體" panose="03000509000000000000" pitchFamily="65" charset="-120"/>
-              </a:rPr>
-              <a:t>情形</a:t>
-            </a:r>
-            <a:endParaRPr lang="en-US" altLang="zh-TW" dirty="0" smtClean="0">
-              <a:latin typeface="標楷體" panose="03000509000000000000" pitchFamily="65" charset="-120"/>
-              <a:ea typeface="標楷體" panose="03000509000000000000" pitchFamily="65" charset="-120"/>
-            </a:endParaRPr>
-          </a:p>
-          <a:p>
-            <a:pPr lvl="2"/>
-            <a:r>
-              <a:rPr lang="zh-TW" altLang="en-US" dirty="0" smtClean="0">
-                <a:latin typeface="標楷體" panose="03000509000000000000" pitchFamily="65" charset="-120"/>
-                <a:ea typeface="標楷體" panose="03000509000000000000" pitchFamily="65" charset="-120"/>
-              </a:rPr>
-              <a:t>邏輯</a:t>
-            </a:r>
-            <a:r>
-              <a:rPr lang="zh-TW" altLang="en-US" dirty="0">
-                <a:latin typeface="標楷體" panose="03000509000000000000" pitchFamily="65" charset="-120"/>
-                <a:ea typeface="標楷體" panose="03000509000000000000" pitchFamily="65" charset="-120"/>
-              </a:rPr>
-              <a:t>迴</a:t>
-            </a:r>
-            <a:r>
-              <a:rPr lang="zh-TW" altLang="en-US" dirty="0" smtClean="0">
-                <a:latin typeface="標楷體" panose="03000509000000000000" pitchFamily="65" charset="-120"/>
-                <a:ea typeface="標楷體" panose="03000509000000000000" pitchFamily="65" charset="-120"/>
-              </a:rPr>
-              <a:t>歸</a:t>
-            </a:r>
-            <a:endParaRPr lang="en-US" altLang="zh-TW" dirty="0">
-              <a:latin typeface="標楷體" panose="03000509000000000000" pitchFamily="65" charset="-120"/>
-              <a:ea typeface="標楷體" panose="03000509000000000000" pitchFamily="65" charset="-120"/>
-            </a:endParaRPr>
-          </a:p>
-          <a:p>
-            <a:pPr lvl="3"/>
-            <a:r>
-              <a:rPr lang="zh-TW" altLang="en-US" dirty="0">
-                <a:latin typeface="標楷體" panose="03000509000000000000" pitchFamily="65" charset="-120"/>
-                <a:ea typeface="標楷體" panose="03000509000000000000" pitchFamily="65" charset="-120"/>
-              </a:rPr>
-              <a:t>邏輯迴歸是一種適用於二元變數的迴歸</a:t>
-            </a:r>
-            <a:r>
-              <a:rPr lang="zh-TW" altLang="en-US" dirty="0" smtClean="0">
-                <a:latin typeface="標楷體" panose="03000509000000000000" pitchFamily="65" charset="-120"/>
-                <a:ea typeface="標楷體" panose="03000509000000000000" pitchFamily="65" charset="-120"/>
-              </a:rPr>
-              <a:t>技術</a:t>
-            </a:r>
-            <a:endParaRPr lang="en-US" altLang="zh-TW" dirty="0" smtClean="0">
               <a:latin typeface="標楷體" panose="03000509000000000000" pitchFamily="65" charset="-120"/>
               <a:ea typeface="標楷體" panose="03000509000000000000" pitchFamily="65" charset="-120"/>
             </a:endParaRPr>
@@ -6318,8 +6076,8 @@
         </p:nvSpPr>
         <p:spPr>
           <a:xfrm>
-            <a:off x="7758545" y="1690688"/>
-            <a:ext cx="3999346" cy="3869603"/>
+            <a:off x="6853349" y="1578154"/>
+            <a:ext cx="4792549" cy="4727230"/>
           </a:xfrm>
           <a:prstGeom prst="irregularSeal1">
             <a:avLst/>
@@ -6345,20 +6103,19 @@
           <a:bodyPr rtlCol="0" anchor="ctr"/>
           <a:lstStyle/>
           <a:p>
-            <a:pPr algn="ctr"/>
             <a:r>
               <a:rPr lang="zh-TW" altLang="en-US" sz="2000" dirty="0" smtClean="0">
                 <a:latin typeface="標楷體" panose="03000509000000000000" pitchFamily="65" charset="-120"/>
                 <a:ea typeface="標楷體" panose="03000509000000000000" pitchFamily="65" charset="-120"/>
               </a:rPr>
-              <a:t>機器學習</a:t>
+              <a:t>進行方式</a:t>
             </a:r>
             <a:r>
               <a:rPr lang="en-US" altLang="zh-TW" sz="2000" dirty="0" smtClean="0">
                 <a:latin typeface="標楷體" panose="03000509000000000000" pitchFamily="65" charset="-120"/>
                 <a:ea typeface="標楷體" panose="03000509000000000000" pitchFamily="65" charset="-120"/>
               </a:rPr>
-              <a:t/>
+              <a:t>:</a:t>
             </a:r>
             <a:br>
               <a:rPr lang="en-US" altLang="zh-TW" sz="2000" dirty="0" smtClean="0">
@@ -6371,7 +6128,175 @@
                 <a:latin typeface="標楷體" panose="03000509000000000000" pitchFamily="65" charset="-120"/>
                 <a:ea typeface="標楷體" panose="03000509000000000000" pitchFamily="65" charset="-120"/>
               </a:rPr>
-              <a:t>Machine Learning </a:t>
+              <a:t>1.</a:t>
+            </a:r>
+            <a:r>
+              <a:rPr lang="zh-TW" altLang="en-US" sz="2000" dirty="0" smtClean="0">
+                <a:latin typeface="標楷體" panose="03000509000000000000" pitchFamily="65" charset="-120"/>
+                <a:ea typeface="標楷體" panose="03000509000000000000" pitchFamily="65" charset="-120"/>
+              </a:rPr>
+              <a:t>說明</a:t>
+            </a:r>
+            <a:r>
+              <a:rPr lang="zh-TW" altLang="en-US" sz="2000" dirty="0">
+                <a:latin typeface="標楷體" panose="03000509000000000000" pitchFamily="65" charset="-120"/>
+                <a:ea typeface="標楷體" panose="03000509000000000000" pitchFamily="65" charset="-120"/>
+              </a:rPr>
+              <a:t>該</a:t>
+            </a:r>
+            <a:r>
+              <a:rPr lang="en-US" altLang="zh-TW" sz="2000" dirty="0" smtClean="0">
+                <a:latin typeface="標楷體" panose="03000509000000000000" pitchFamily="65" charset="-120"/>
+                <a:ea typeface="標楷體" panose="03000509000000000000" pitchFamily="65" charset="-120"/>
+              </a:rPr>
+              <a:t>Algorithm</a:t>
+            </a:r>
+          </a:p>
+          <a:p>
+            <a:r>
+              <a:rPr lang="en-US" altLang="zh-TW" sz="2000" dirty="0" smtClean="0">
+                <a:latin typeface="標楷體" panose="03000509000000000000" pitchFamily="65" charset="-120"/>
+                <a:ea typeface="標楷體" panose="03000509000000000000" pitchFamily="65" charset="-120"/>
+              </a:rPr>
+              <a:t>2.</a:t>
+            </a:r>
+            <a:r>
+              <a:rPr lang="zh-TW" altLang="en-US" sz="2000" dirty="0" smtClean="0">
+                <a:latin typeface="標楷體" panose="03000509000000000000" pitchFamily="65" charset="-120"/>
+                <a:ea typeface="標楷體" panose="03000509000000000000" pitchFamily="65" charset="-120"/>
+              </a:rPr>
+              <a:t>以</a:t>
+            </a:r>
+            <a:r>
+              <a:rPr lang="en-US" altLang="zh-TW" sz="2000" dirty="0" smtClean="0">
+                <a:solidFill>
+                  <a:srgbClr val="0000FF"/>
+                </a:solidFill>
+                <a:latin typeface="標楷體" panose="03000509000000000000" pitchFamily="65" charset="-120"/>
+                <a:ea typeface="標楷體" panose="03000509000000000000" pitchFamily="65" charset="-120"/>
+              </a:rPr>
+              <a:t>Python</a:t>
+            </a:r>
+            <a:r>
+              <a:rPr lang="zh-TW" altLang="en-US" sz="2000" dirty="0" smtClean="0">
+                <a:latin typeface="標楷體" panose="03000509000000000000" pitchFamily="65" charset="-120"/>
+                <a:ea typeface="標楷體" panose="03000509000000000000" pitchFamily="65" charset="-120"/>
+              </a:rPr>
+              <a:t>執行</a:t>
+            </a:r>
+            <a:r>
+              <a:rPr lang="en-US" altLang="zh-TW" sz="2000" dirty="0" smtClean="0">
+                <a:latin typeface="標楷體" panose="03000509000000000000" pitchFamily="65" charset="-120"/>
+                <a:ea typeface="標楷體" panose="03000509000000000000" pitchFamily="65" charset="-120"/>
+              </a:rPr>
+              <a:t/>
+            </a:r>
+            <a:br>
+              <a:rPr lang="en-US" altLang="zh-TW" sz="2000" dirty="0" smtClean="0">
+                <a:latin typeface="標楷體" panose="03000509000000000000" pitchFamily="65" charset="-120"/>
+                <a:ea typeface="標楷體" panose="03000509000000000000" pitchFamily="65" charset="-120"/>
+              </a:rPr>
+            </a:br>
+            <a:r>
+              <a:rPr lang="zh-TW" altLang="en-US" sz="2000" dirty="0" smtClean="0">
+                <a:latin typeface="標楷體" panose="03000509000000000000" pitchFamily="65" charset="-120"/>
+                <a:ea typeface="標楷體" panose="03000509000000000000" pitchFamily="65" charset="-120"/>
+              </a:rPr>
+              <a:t>使用工具</a:t>
+            </a:r>
+            <a:r>
+              <a:rPr lang="en-US" altLang="zh-TW" sz="2000" dirty="0" smtClean="0">
+                <a:latin typeface="標楷體" panose="03000509000000000000" pitchFamily="65" charset="-120"/>
+                <a:ea typeface="標楷體" panose="03000509000000000000" pitchFamily="65" charset="-120"/>
+              </a:rPr>
+              <a:t>:</a:t>
+            </a:r>
+            <a:r>
+              <a:rPr lang="en-US" altLang="zh-TW" sz="2000" b="1" dirty="0" smtClean="0">
+                <a:solidFill>
+                  <a:srgbClr val="FFFF00"/>
+                </a:solidFill>
+                <a:latin typeface="標楷體" panose="03000509000000000000" pitchFamily="65" charset="-120"/>
+                <a:ea typeface="標楷體" panose="03000509000000000000" pitchFamily="65" charset="-120"/>
+              </a:rPr>
+              <a:t>Google </a:t>
+            </a:r>
+            <a:r>
+              <a:rPr lang="en-US" altLang="zh-TW" sz="2000" b="1" dirty="0" err="1" smtClean="0">
+                <a:solidFill>
+                  <a:srgbClr val="FFFF00"/>
+                </a:solidFill>
+                <a:latin typeface="標楷體" panose="03000509000000000000" pitchFamily="65" charset="-120"/>
+                <a:ea typeface="標楷體" panose="03000509000000000000" pitchFamily="65" charset="-120"/>
+              </a:rPr>
+              <a:t>Colab</a:t>
+            </a:r>
+            <a:r>
+              <a:rPr lang="en-US" altLang="zh-TW" sz="2000" b="1" dirty="0" smtClean="0">
+                <a:solidFill>
+                  <a:srgbClr val="FFC000"/>
+                </a:solidFill>
+                <a:latin typeface="標楷體" panose="03000509000000000000" pitchFamily="65" charset="-120"/>
+                <a:ea typeface="標楷體" panose="03000509000000000000" pitchFamily="65" charset="-120"/>
+              </a:rPr>
+              <a:t> &amp; </a:t>
+            </a:r>
+            <a:r>
+              <a:rPr lang="en-US" altLang="zh-TW" sz="2000" b="1" dirty="0" err="1" smtClean="0">
+                <a:solidFill>
+                  <a:srgbClr val="FFC000"/>
+                </a:solidFill>
+                <a:latin typeface="標楷體" panose="03000509000000000000" pitchFamily="65" charset="-120"/>
+                <a:ea typeface="標楷體" panose="03000509000000000000" pitchFamily="65" charset="-120"/>
+              </a:rPr>
+              <a:t>VSCode</a:t>
+            </a:r>
+            <a:endParaRPr lang="en-US" altLang="zh-TW" sz="2000" b="1" dirty="0" smtClean="0">
+              <a:solidFill>
+                <a:srgbClr val="FFC000"/>
+              </a:solidFill>
+              <a:latin typeface="標楷體" panose="03000509000000000000" pitchFamily="65" charset="-120"/>
+              <a:ea typeface="標楷體" panose="03000509000000000000" pitchFamily="65" charset="-120"/>
+            </a:endParaRPr>
+          </a:p>
+          <a:p>
+            <a:r>
+              <a:rPr lang="en-US" altLang="zh-TW" sz="2000" dirty="0" smtClean="0">
+                <a:latin typeface="標楷體" panose="03000509000000000000" pitchFamily="65" charset="-120"/>
+                <a:ea typeface="標楷體" panose="03000509000000000000" pitchFamily="65" charset="-120"/>
+              </a:rPr>
+              <a:t>3.</a:t>
+            </a:r>
+            <a:r>
+              <a:rPr lang="zh-TW" altLang="en-US" sz="2000" dirty="0" smtClean="0">
+                <a:latin typeface="標楷體" panose="03000509000000000000" pitchFamily="65" charset="-120"/>
+                <a:ea typeface="標楷體" panose="03000509000000000000" pitchFamily="65" charset="-120"/>
+              </a:rPr>
+              <a:t>有些以</a:t>
+            </a:r>
+            <a:r>
+              <a:rPr lang="en-US" altLang="zh-TW" sz="2000" dirty="0" smtClean="0">
+                <a:solidFill>
+                  <a:srgbClr val="FF0000"/>
+                </a:solidFill>
+                <a:latin typeface="標楷體" panose="03000509000000000000" pitchFamily="65" charset="-120"/>
+                <a:ea typeface="標楷體" panose="03000509000000000000" pitchFamily="65" charset="-120"/>
+              </a:rPr>
+              <a:t>Excel</a:t>
+            </a:r>
+            <a:r>
+              <a:rPr lang="zh-TW" altLang="en-US" sz="2000" dirty="0" smtClean="0">
+                <a:latin typeface="標楷體" panose="03000509000000000000" pitchFamily="65" charset="-120"/>
+                <a:ea typeface="標楷體" panose="03000509000000000000" pitchFamily="65" charset="-120"/>
+              </a:rPr>
+              <a:t>來計算</a:t>
+            </a:r>
+            <a:r>
+              <a:rPr lang="en-US" altLang="zh-TW" sz="2000" dirty="0" smtClean="0">
+                <a:latin typeface="標楷體" panose="03000509000000000000" pitchFamily="65" charset="-120"/>
+                <a:ea typeface="標楷體" panose="03000509000000000000" pitchFamily="65" charset="-120"/>
+              </a:rPr>
+              <a:t> </a:t>
             </a:r>
             <a:endParaRPr lang="zh-TW" altLang="en-US" sz="2000" dirty="0">
               <a:latin typeface="標楷體" panose="03000509000000000000" pitchFamily="65" charset="-120"/>
@@ -6561,6 +6486,16 @@
           <a:p>
             <a:pPr algn="ctr"/>
             <a:r>
+              <a:rPr lang="zh-TW" altLang="en-US" dirty="0">
+                <a:solidFill>
+                  <a:srgbClr val="FF0000"/>
+                </a:solidFill>
+                <a:latin typeface="標楷體" panose="03000509000000000000" pitchFamily="65" charset="-120"/>
+                <a:ea typeface="標楷體" panose="03000509000000000000" pitchFamily="65" charset="-120"/>
+              </a:rPr>
+              <a:t>課程焦點</a:t>
+            </a:r>
+            <a:r>
               <a:rPr lang="zh-TW" altLang="en-US" dirty="0" smtClean="0">
                 <a:solidFill>
                   <a:srgbClr val="FF0000"/>
@@ -6568,7 +6503,7 @@
                 <a:latin typeface="標楷體" panose="03000509000000000000" pitchFamily="65" charset="-120"/>
                 <a:ea typeface="標楷體" panose="03000509000000000000" pitchFamily="65" charset="-120"/>
               </a:rPr>
-              <a:t>本學期焦點三</a:t>
+              <a:t>三</a:t>
             </a:r>
             <a:r>
               <a:rPr lang="en-US" altLang="zh-TW" dirty="0" smtClean="0">
@@ -6578,7 +6513,27 @@
                 <a:latin typeface="標楷體" panose="03000509000000000000" pitchFamily="65" charset="-120"/>
                 <a:ea typeface="標楷體" panose="03000509000000000000" pitchFamily="65" charset="-120"/>
               </a:rPr>
-              <a:t>:</a:t>
+              <a:t>(6</a:t>
+            </a:r>
+            <a:r>
+              <a:rPr lang="zh-TW" altLang="en-US" dirty="0">
+                <a:solidFill>
+                  <a:srgbClr val="FF0000"/>
+                </a:solidFill>
+                <a:latin typeface="標楷體" panose="03000509000000000000" pitchFamily="65" charset="-120"/>
+                <a:ea typeface="標楷體" panose="03000509000000000000" pitchFamily="65" charset="-120"/>
+              </a:rPr>
+              <a:t>週</a:t>
+            </a:r>
+            <a:r>
+              <a:rPr lang="en-US" altLang="zh-TW" dirty="0" smtClean="0">
+                <a:solidFill>
+                  <a:srgbClr val="FF0000"/>
+                </a:solidFill>
+                <a:latin typeface="標楷體" panose="03000509000000000000" pitchFamily="65" charset="-120"/>
+                <a:ea typeface="標楷體" panose="03000509000000000000" pitchFamily="65" charset="-120"/>
+              </a:rPr>
+              <a:t>):</a:t>
             </a:r>
             <a:r>
               <a:rPr lang="zh-TW" altLang="en-US" dirty="0" smtClean="0">
@@ -6609,85 +6564,6 @@
                 <a:ea typeface="標楷體" panose="03000509000000000000" pitchFamily="65" charset="-120"/>
               </a:rPr>
               <a:t>網站</a:t>
-            </a:r>
-            <a:r>
-              <a:rPr lang="en-US" altLang="zh-TW" dirty="0" smtClean="0">
-                <a:solidFill>
-                  <a:srgbClr val="FF0000"/>
-                </a:solidFill>
-                <a:latin typeface="標楷體" panose="03000509000000000000" pitchFamily="65" charset="-120"/>
-                <a:ea typeface="標楷體" panose="03000509000000000000" pitchFamily="65" charset="-120"/>
-              </a:rPr>
-              <a:t/>
-            </a:r>
-            <a:br>
-              <a:rPr lang="en-US" altLang="zh-TW" dirty="0" smtClean="0">
-                <a:solidFill>
-                  <a:srgbClr val="FF0000"/>
-                </a:solidFill>
-                <a:latin typeface="標楷體" panose="03000509000000000000" pitchFamily="65" charset="-120"/>
-                <a:ea typeface="標楷體" panose="03000509000000000000" pitchFamily="65" charset="-120"/>
-              </a:rPr>
-            </a:br>
-            <a:r>
-              <a:rPr lang="en-US" altLang="zh-TW" dirty="0">
-                <a:solidFill>
-                  <a:srgbClr val="FF0000"/>
-                </a:solidFill>
-                <a:latin typeface="標楷體" panose="03000509000000000000" pitchFamily="65" charset="-120"/>
-                <a:ea typeface="標楷體" panose="03000509000000000000" pitchFamily="65" charset="-120"/>
-              </a:rPr>
-              <a:t>(</a:t>
-            </a:r>
-            <a:r>
-              <a:rPr lang="zh-TW" altLang="en-US" dirty="0">
-                <a:solidFill>
-                  <a:srgbClr val="FF0000"/>
-                </a:solidFill>
-                <a:latin typeface="標楷體" panose="03000509000000000000" pitchFamily="65" charset="-120"/>
-                <a:ea typeface="標楷體" panose="03000509000000000000" pitchFamily="65" charset="-120"/>
-              </a:rPr>
-              <a:t>後</a:t>
-            </a:r>
-            <a:r>
-              <a:rPr lang="en-US" altLang="zh-TW" dirty="0">
-                <a:solidFill>
-                  <a:srgbClr val="FF0000"/>
-                </a:solidFill>
-                <a:latin typeface="標楷體" panose="03000509000000000000" pitchFamily="65" charset="-120"/>
-                <a:ea typeface="標楷體" panose="03000509000000000000" pitchFamily="65" charset="-120"/>
-              </a:rPr>
-              <a:t>6</a:t>
-            </a:r>
-            <a:r>
-              <a:rPr lang="zh-TW" altLang="en-US" dirty="0">
-                <a:solidFill>
-                  <a:srgbClr val="FF0000"/>
-                </a:solidFill>
-                <a:latin typeface="標楷體" panose="03000509000000000000" pitchFamily="65" charset="-120"/>
-                <a:ea typeface="標楷體" panose="03000509000000000000" pitchFamily="65" charset="-120"/>
-              </a:rPr>
-              <a:t>週</a:t>
-            </a:r>
-            <a:r>
-              <a:rPr lang="en-US" altLang="zh-TW" dirty="0" smtClean="0">
-                <a:solidFill>
-                  <a:srgbClr val="FF0000"/>
-                </a:solidFill>
-                <a:latin typeface="標楷體" panose="03000509000000000000" pitchFamily="65" charset="-120"/>
-                <a:ea typeface="標楷體" panose="03000509000000000000" pitchFamily="65" charset="-120"/>
-              </a:rPr>
-              <a:t>)</a:t>
-            </a:r>
-            <a:r>
-              <a:rPr lang="zh-TW" altLang="en-US" dirty="0">
-                <a:solidFill>
-                  <a:srgbClr val="0000FF"/>
-                </a:solidFill>
-                <a:latin typeface="標楷體" panose="03000509000000000000" pitchFamily="65" charset="-120"/>
-                <a:ea typeface="標楷體" panose="03000509000000000000" pitchFamily="65" charset="-120"/>
-              </a:rPr>
-              <a:t>課程方向</a:t>
             </a:r>
             <a:endParaRPr lang="zh-TW" altLang="en-US" dirty="0">
               <a:solidFill>
@@ -6856,6 +6732,16 @@
           <a:p>
             <a:pPr lvl="1"/>
             <a:r>
+              <a:rPr lang="zh-TW" altLang="en-US" dirty="0">
+                <a:solidFill>
+                  <a:srgbClr val="FF0000"/>
+                </a:solidFill>
+                <a:latin typeface="標楷體" panose="03000509000000000000" pitchFamily="65" charset="-120"/>
+                <a:ea typeface="標楷體" panose="03000509000000000000" pitchFamily="65" charset="-120"/>
+              </a:rPr>
+              <a:t>現在就開始</a:t>
+            </a:r>
+            <a:r>
               <a:rPr lang="zh-TW" altLang="en-US" dirty="0" smtClean="0">
                 <a:solidFill>
                   <a:srgbClr val="FF0000"/>
@@ -6863,7 +6749,7 @@
                 <a:latin typeface="標楷體" panose="03000509000000000000" pitchFamily="65" charset="-120"/>
                 <a:ea typeface="標楷體" panose="03000509000000000000" pitchFamily="65" charset="-120"/>
               </a:rPr>
-              <a:t>熟</a:t>
+              <a:t>熟悉</a:t>
             </a:r>
             <a:r>
               <a:rPr lang="en-US" altLang="zh-TW" dirty="0" smtClean="0">
@@ -6903,27 +6789,20 @@
                 <a:latin typeface="標楷體" panose="03000509000000000000" pitchFamily="65" charset="-120"/>
                 <a:ea typeface="標楷體" panose="03000509000000000000" pitchFamily="65" charset="-120"/>
               </a:rPr>
-              <a:t> + Python (</a:t>
-            </a:r>
-            <a:r>
-              <a:rPr lang="zh-TW" altLang="en-US" dirty="0" smtClean="0">
+              <a:t> + VS Code</a:t>
+            </a:r>
+          </a:p>
+          <a:p>
+            <a:pPr lvl="2"/>
+            <a:r>
+              <a:rPr lang="en-US" altLang="zh-TW" dirty="0" smtClean="0">
                 <a:solidFill>
                   <a:srgbClr val="FF0000"/>
                 </a:solidFill>
                 <a:latin typeface="標楷體" panose="03000509000000000000" pitchFamily="65" charset="-120"/>
                 <a:ea typeface="標楷體" panose="03000509000000000000" pitchFamily="65" charset="-120"/>
               </a:rPr>
-              <a:t>現在就開始</a:t>
-            </a:r>
-            <a:r>
-              <a:rPr lang="en-US" altLang="zh-TW" dirty="0" smtClean="0">
-                <a:solidFill>
-                  <a:srgbClr val="FF0000"/>
-                </a:solidFill>
-                <a:latin typeface="標楷體" panose="03000509000000000000" pitchFamily="65" charset="-120"/>
-                <a:ea typeface="標楷體" panose="03000509000000000000" pitchFamily="65" charset="-120"/>
-              </a:rPr>
-              <a:t>)</a:t>
+              <a:t>Python</a:t>
             </a:r>
             <a:endParaRPr lang="en-US" altLang="zh-TW" dirty="0">
               <a:solidFill>
@@ -7388,6 +7267,276 @@
         </p:nvSpPr>
         <p:spPr>
           <a:xfrm>
+            <a:off x="838200" y="106508"/>
+            <a:ext cx="10515600" cy="789420"/>
+          </a:xfrm>
+        </p:spPr>
+        <p:txBody>
+          <a:bodyPr/>
+          <a:lstStyle/>
+          <a:p>
+            <a:pPr algn="ctr"/>
+            <a:r>
+              <a:rPr lang="zh-TW" altLang="en-US" dirty="0" smtClean="0">
+                <a:solidFill>
+                  <a:srgbClr val="FF0000"/>
+                </a:solidFill>
+                <a:latin typeface="標楷體" panose="03000509000000000000" pitchFamily="65" charset="-120"/>
+                <a:ea typeface="標楷體" panose="03000509000000000000" pitchFamily="65" charset="-120"/>
+              </a:rPr>
+              <a:t>課程訊息發布</a:t>
+            </a:r>
+            <a:endParaRPr lang="zh-TW" altLang="en-US" dirty="0">
+              <a:solidFill>
+                <a:srgbClr val="FF0000"/>
+              </a:solidFill>
+              <a:latin typeface="標楷體" panose="03000509000000000000" pitchFamily="65" charset="-120"/>
+              <a:ea typeface="標楷體" panose="03000509000000000000" pitchFamily="65" charset="-120"/>
+            </a:endParaRPr>
+          </a:p>
+        </p:txBody>
+      </p:sp>
+      <p:sp>
+        <p:nvSpPr>
+          <p:cNvPr id="3" name="內容版面配置區 2"/>
+          <p:cNvSpPr>
+            <a:spLocks noGrp="1"/>
+          </p:cNvSpPr>
+          <p:nvPr>
+            <p:ph idx="1"/>
+          </p:nvPr>
+        </p:nvSpPr>
+        <p:spPr>
+          <a:xfrm>
+            <a:off x="690418" y="966644"/>
+            <a:ext cx="10515600" cy="2857211"/>
+          </a:xfrm>
+        </p:spPr>
+        <p:txBody>
+          <a:bodyPr/>
+          <a:lstStyle/>
+          <a:p>
+            <a:r>
+              <a:rPr lang="en-US" altLang="zh-TW" dirty="0" smtClean="0">
+                <a:solidFill>
+                  <a:srgbClr val="0000FF"/>
+                </a:solidFill>
+                <a:latin typeface="標楷體" panose="03000509000000000000" pitchFamily="65" charset="-120"/>
+                <a:ea typeface="標楷體" panose="03000509000000000000" pitchFamily="65" charset="-120"/>
+              </a:rPr>
+              <a:t>LINE</a:t>
+            </a:r>
+            <a:r>
+              <a:rPr lang="zh-TW" altLang="en-US" dirty="0">
+                <a:solidFill>
+                  <a:srgbClr val="0000FF"/>
+                </a:solidFill>
+                <a:latin typeface="標楷體" panose="03000509000000000000" pitchFamily="65" charset="-120"/>
+                <a:ea typeface="標楷體" panose="03000509000000000000" pitchFamily="65" charset="-120"/>
+              </a:rPr>
+              <a:t>群組名為</a:t>
+            </a:r>
+            <a:r>
+              <a:rPr lang="en-US" altLang="zh-TW" dirty="0">
+                <a:solidFill>
+                  <a:srgbClr val="0000FF"/>
+                </a:solidFill>
+                <a:latin typeface="標楷體" panose="03000509000000000000" pitchFamily="65" charset="-120"/>
+                <a:ea typeface="標楷體" panose="03000509000000000000" pitchFamily="65" charset="-120"/>
+              </a:rPr>
+              <a:t>: </a:t>
+            </a:r>
+            <a:r>
+              <a:rPr lang="en-US" altLang="zh-TW" dirty="0" smtClean="0">
+                <a:solidFill>
+                  <a:srgbClr val="0000FF"/>
+                </a:solidFill>
+                <a:latin typeface="標楷體" panose="03000509000000000000" pitchFamily="65" charset="-120"/>
+                <a:ea typeface="標楷體" panose="03000509000000000000" pitchFamily="65" charset="-120"/>
+              </a:rPr>
+              <a:t>114</a:t>
+            </a:r>
+            <a:r>
+              <a:rPr lang="zh-TW" altLang="en-US" dirty="0" smtClean="0">
+                <a:solidFill>
+                  <a:srgbClr val="0000FF"/>
+                </a:solidFill>
+                <a:latin typeface="標楷體" panose="03000509000000000000" pitchFamily="65" charset="-120"/>
+                <a:ea typeface="標楷體" panose="03000509000000000000" pitchFamily="65" charset="-120"/>
+              </a:rPr>
+              <a:t>資料探勘</a:t>
+            </a:r>
+            <a:endParaRPr lang="en-US" altLang="zh-TW" dirty="0" smtClean="0">
+              <a:solidFill>
+                <a:srgbClr val="0000FF"/>
+              </a:solidFill>
+              <a:latin typeface="標楷體" panose="03000509000000000000" pitchFamily="65" charset="-120"/>
+              <a:ea typeface="標楷體" panose="03000509000000000000" pitchFamily="65" charset="-120"/>
+            </a:endParaRPr>
+          </a:p>
+          <a:p>
+            <a:r>
+              <a:rPr lang="zh-TW" altLang="en-US" dirty="0" smtClean="0">
+                <a:solidFill>
+                  <a:srgbClr val="0000FF"/>
+                </a:solidFill>
+                <a:latin typeface="標楷體" panose="03000509000000000000" pitchFamily="65" charset="-120"/>
+                <a:ea typeface="標楷體" panose="03000509000000000000" pitchFamily="65" charset="-120"/>
+              </a:rPr>
+              <a:t>課程問題找不到老師的可以先找小老師洽詢</a:t>
+            </a:r>
+            <a:endParaRPr lang="en-US" altLang="zh-TW" dirty="0" smtClean="0">
+              <a:solidFill>
+                <a:srgbClr val="0000FF"/>
+              </a:solidFill>
+              <a:latin typeface="標楷體" panose="03000509000000000000" pitchFamily="65" charset="-120"/>
+              <a:ea typeface="標楷體" panose="03000509000000000000" pitchFamily="65" charset="-120"/>
+            </a:endParaRPr>
+          </a:p>
+          <a:p>
+            <a:r>
+              <a:rPr lang="zh-TW" altLang="en-US" dirty="0" smtClean="0">
+                <a:solidFill>
+                  <a:srgbClr val="0000FF"/>
+                </a:solidFill>
+                <a:latin typeface="標楷體" panose="03000509000000000000" pitchFamily="65" charset="-120"/>
+                <a:ea typeface="標楷體" panose="03000509000000000000" pitchFamily="65" charset="-120"/>
+              </a:rPr>
+              <a:t>使用課本</a:t>
+            </a:r>
+            <a:endParaRPr lang="en-US" altLang="zh-TW" dirty="0" smtClean="0">
+              <a:solidFill>
+                <a:srgbClr val="0000FF"/>
+              </a:solidFill>
+              <a:latin typeface="標楷體" panose="03000509000000000000" pitchFamily="65" charset="-120"/>
+              <a:ea typeface="標楷體" panose="03000509000000000000" pitchFamily="65" charset="-120"/>
+            </a:endParaRPr>
+          </a:p>
+          <a:p>
+            <a:r>
+              <a:rPr lang="zh-TW" altLang="en-US" dirty="0" smtClean="0">
+                <a:solidFill>
+                  <a:srgbClr val="0000FF"/>
+                </a:solidFill>
+                <a:latin typeface="標楷體" panose="03000509000000000000" pitchFamily="65" charset="-120"/>
+                <a:ea typeface="標楷體" panose="03000509000000000000" pitchFamily="65" charset="-120"/>
+              </a:rPr>
+              <a:t>上課內容雲端連接</a:t>
+            </a:r>
+            <a:r>
+              <a:rPr lang="en-US" altLang="zh-TW" dirty="0" smtClean="0">
+                <a:solidFill>
+                  <a:srgbClr val="0000FF"/>
+                </a:solidFill>
+                <a:latin typeface="標楷體" panose="03000509000000000000" pitchFamily="65" charset="-120"/>
+                <a:ea typeface="標楷體" panose="03000509000000000000" pitchFamily="65" charset="-120"/>
+              </a:rPr>
+              <a:t>: </a:t>
+            </a:r>
+            <a:r>
+              <a:rPr lang="en-US" altLang="zh-TW" dirty="0" smtClean="0">
+                <a:latin typeface="標楷體" panose="03000509000000000000" pitchFamily="65" charset="-120"/>
+                <a:ea typeface="標楷體" panose="03000509000000000000" pitchFamily="65" charset="-120"/>
+              </a:rPr>
+              <a:t>Google Classroom</a:t>
+            </a:r>
+            <a:endParaRPr lang="zh-TW" altLang="en-US" dirty="0">
+              <a:latin typeface="標楷體" panose="03000509000000000000" pitchFamily="65" charset="-120"/>
+              <a:ea typeface="標楷體" panose="03000509000000000000" pitchFamily="65" charset="-120"/>
+            </a:endParaRPr>
+          </a:p>
+        </p:txBody>
+      </p:sp>
+      <p:pic>
+        <p:nvPicPr>
+          <p:cNvPr id="6" name="圖片 5"/>
+          <p:cNvPicPr>
+            <a:picLocks noChangeAspect="1"/>
+          </p:cNvPicPr>
+          <p:nvPr/>
+        </p:nvPicPr>
+        <p:blipFill>
+          <a:blip r:embed="rId2"/>
+          <a:stretch>
+            <a:fillRect/>
+          </a:stretch>
+        </p:blipFill>
+        <p:spPr>
+          <a:xfrm>
+            <a:off x="2215361" y="3357171"/>
+            <a:ext cx="2498563" cy="3386402"/>
+          </a:xfrm>
+          <a:prstGeom prst="rect">
+            <a:avLst/>
+          </a:prstGeom>
+        </p:spPr>
+      </p:pic>
+      <p:pic>
+        <p:nvPicPr>
+          <p:cNvPr id="7" name="圖片 6"/>
+          <p:cNvPicPr>
+            <a:picLocks noChangeAspect="1"/>
+          </p:cNvPicPr>
+          <p:nvPr/>
+        </p:nvPicPr>
+        <p:blipFill>
+          <a:blip r:embed="rId3"/>
+          <a:stretch>
+            <a:fillRect/>
+          </a:stretch>
+        </p:blipFill>
+        <p:spPr>
+          <a:xfrm>
+            <a:off x="7215045" y="3353378"/>
+            <a:ext cx="1993793" cy="3390195"/>
+          </a:xfrm>
+          <a:prstGeom prst="rect">
+            <a:avLst/>
+          </a:prstGeom>
+        </p:spPr>
+      </p:pic>
+    </p:spTree>
+    <p:extLst>
+      <p:ext uri="{BB962C8B-B14F-4D97-AF65-F5344CB8AC3E}">
+        <p14:creationId xmlns:p14="http://schemas.microsoft.com/office/powerpoint/2010/main" val="347606592"/>
+      </p:ext>
+    </p:extLst>
+  </p:cSld>
+  <p:clrMapOvr>
+    <a:masterClrMapping/>
+  </p:clrMapOvr>
+</p:sld>
+</file>
+
+<file path=ppt/slides/slide8.xml><?xml version="1.0" encoding="utf-8"?>
+<p:sld xmlns:a="http://schemas.openxmlformats.org/drawingml/2006/main" xmlns:r="http://schemas.openxmlformats.org/officeDocument/2006/relationships" xmlns:p="http://schemas.openxmlformats.org/presentationml/2006/main">
+  <p:cSld>
+    <p:spTree>
+      <p:nvGrpSpPr>
+        <p:cNvPr id="1" name=""/>
+        <p:cNvGrpSpPr/>
+        <p:nvPr/>
+      </p:nvGrpSpPr>
+      <p:grpSpPr>
+        <a:xfrm>
+          <a:off x="0" y="0"/>
+          <a:ext cx="0" cy="0"/>
+          <a:chOff x="0" y="0"/>
+          <a:chExt cx="0" cy="0"/>
+        </a:xfrm>
+      </p:grpSpPr>
+      <p:sp>
+        <p:nvSpPr>
+          <p:cNvPr id="2" name="標題 1"/>
+          <p:cNvSpPr>
+            <a:spLocks noGrp="1"/>
+          </p:cNvSpPr>
+          <p:nvPr>
+            <p:ph type="title"/>
+          </p:nvPr>
+        </p:nvSpPr>
+        <p:spPr>
+          <a:xfrm>
             <a:off x="838200" y="175434"/>
             <a:ext cx="10515600" cy="1092650"/>
           </a:xfrm>
@@ -8052,11 +8201,25 @@
               <a:t>PPT</a:t>
             </a:r>
             <a:r>
+              <a:rPr lang="zh-TW" altLang="en-US" sz="2000" u="sng" dirty="0" smtClean="0">
+                <a:latin typeface="標楷體" panose="03000509000000000000" pitchFamily="65" charset="-120"/>
+                <a:ea typeface="標楷體" panose="03000509000000000000" pitchFamily="65" charset="-120"/>
+              </a:rPr>
+              <a:t>時</a:t>
+            </a:r>
+            <a:r>
+              <a:rPr lang="en-US" altLang="zh-TW" sz="2000" u="sng" dirty="0" smtClean="0">
+                <a:latin typeface="標楷體" panose="03000509000000000000" pitchFamily="65" charset="-120"/>
+                <a:ea typeface="標楷體" panose="03000509000000000000" pitchFamily="65" charset="-120"/>
+              </a:rPr>
+              <a:t> - </a:t>
+            </a:r>
+            <a:r>
               <a:rPr lang="zh-TW" altLang="en-US" sz="2000" u="sng" dirty="0">
                 <a:latin typeface="標楷體" panose="03000509000000000000" pitchFamily="65" charset="-120"/>
                 <a:ea typeface="標楷體" panose="03000509000000000000" pitchFamily="65" charset="-120"/>
               </a:rPr>
-              <a:t>時</a:t>
+              <a:t>務必讓台下聽眾聽得懂你說的圖表成果內容</a:t>
             </a:r>
             <a:r>
               <a:rPr lang="en-US" altLang="zh-TW" sz="2000" u="sng" dirty="0">
@@ -8070,7 +8233,7 @@
                 <a:latin typeface="標楷體" panose="03000509000000000000" pitchFamily="65" charset="-120"/>
                 <a:ea typeface="標楷體" panose="03000509000000000000" pitchFamily="65" charset="-120"/>
               </a:rPr>
-              <a:t>務必讓台下聽眾聽得懂你說的圖表成果內容</a:t>
+              <a:t>說得清楚的</a:t>
             </a:r>
             <a:r>
               <a:rPr lang="en-US" altLang="zh-TW" sz="2000" u="sng" dirty="0">
@@ -8084,38 +8247,31 @@
                 <a:latin typeface="標楷體" panose="03000509000000000000" pitchFamily="65" charset="-120"/>
                 <a:ea typeface="標楷體" panose="03000509000000000000" pitchFamily="65" charset="-120"/>
               </a:rPr>
-              <a:t>說得清楚的</a:t>
-            </a:r>
-            <a:r>
-              <a:rPr lang="en-US" altLang="zh-TW" sz="2000" u="sng" dirty="0">
-                <a:latin typeface="標楷體" panose="03000509000000000000" pitchFamily="65" charset="-120"/>
-                <a:ea typeface="標楷體" panose="03000509000000000000" pitchFamily="65" charset="-120"/>
-              </a:rPr>
-              <a:t>, </a:t>
-            </a:r>
+              <a:t>分數愈高</a:t>
+            </a:r>
+          </a:p>
+          <a:p>
+            <a:pPr algn="ctr"/>
             <a:r>
               <a:rPr lang="zh-TW" altLang="en-US" sz="2000" u="sng" dirty="0">
                 <a:latin typeface="標楷體" panose="03000509000000000000" pitchFamily="65" charset="-120"/>
                 <a:ea typeface="標楷體" panose="03000509000000000000" pitchFamily="65" charset="-120"/>
               </a:rPr>
-              <a:t>分數愈高</a:t>
-            </a:r>
-          </a:p>
-          <a:p>
-            <a:pPr algn="ctr"/>
-            <a:r>
-              <a:rPr lang="zh-TW" altLang="en-US" sz="2000" u="sng" dirty="0">
-                <a:latin typeface="標楷體" panose="03000509000000000000" pitchFamily="65" charset="-120"/>
-                <a:ea typeface="標楷體" panose="03000509000000000000" pitchFamily="65" charset="-120"/>
-              </a:rPr>
-              <a:t>說明程式時</a:t>
-            </a:r>
-            <a:r>
-              <a:rPr lang="en-US" altLang="zh-TW" sz="2000" u="sng" dirty="0">
-                <a:latin typeface="標楷體" panose="03000509000000000000" pitchFamily="65" charset="-120"/>
-                <a:ea typeface="標楷體" panose="03000509000000000000" pitchFamily="65" charset="-120"/>
-              </a:rPr>
-              <a:t>, </a:t>
+              <a:t>說明程式</a:t>
+            </a:r>
+            <a:r>
+              <a:rPr lang="zh-TW" altLang="en-US" sz="2000" u="sng" dirty="0" smtClean="0">
+                <a:latin typeface="標楷體" panose="03000509000000000000" pitchFamily="65" charset="-120"/>
+                <a:ea typeface="標楷體" panose="03000509000000000000" pitchFamily="65" charset="-120"/>
+              </a:rPr>
+              <a:t>時 </a:t>
+            </a:r>
+            <a:r>
+              <a:rPr lang="en-US" altLang="zh-TW" sz="2000" u="sng" dirty="0" smtClean="0">
+                <a:latin typeface="標楷體" panose="03000509000000000000" pitchFamily="65" charset="-120"/>
+                <a:ea typeface="標楷體" panose="03000509000000000000" pitchFamily="65" charset="-120"/>
+              </a:rPr>
+              <a:t>- </a:t>
             </a:r>
             <a:r>
               <a:rPr lang="zh-TW" altLang="en-US" sz="2000" u="sng" dirty="0">
@@ -8299,7 +8455,7 @@
 </p:sld>
 </file>
 
-<file path=ppt/slides/slide8.xml><?xml version="1.0" encoding="utf-8"?>
+<file path=ppt/slides/slide9.xml><?xml version="1.0" encoding="utf-8"?>
 <p:sld xmlns:a="http://schemas.openxmlformats.org/drawingml/2006/main" xmlns:r="http://schemas.openxmlformats.org/officeDocument/2006/relationships" xmlns:p="http://schemas.openxmlformats.org/presentationml/2006/main">
   <p:cSld>
     <p:spTree>
@@ -9327,263 +9483,6 @@
 </p:sld>
 </file>
 
-<file path=ppt/slides/slide9.xml><?xml version="1.0" encoding="utf-8"?>
-<p:sld xmlns:a="http://schemas.openxmlformats.org/drawingml/2006/main" xmlns:r="http://schemas.openxmlformats.org/officeDocument/2006/relationships" xmlns:p="http://schemas.openxmlformats.org/presentationml/2006/main">
-  <p:cSld>
-    <p:spTree>
-      <p:nvGrpSpPr>
-        <p:cNvPr id="1" name=""/>
-        <p:cNvGrpSpPr/>
-        <p:nvPr/>
-      </p:nvGrpSpPr>
-      <p:grpSpPr>
-        <a:xfrm>
-          <a:off x="0" y="0"/>
-          <a:ext cx="0" cy="0"/>
-          <a:chOff x="0" y="0"/>
-          <a:chExt cx="0" cy="0"/>
-        </a:xfrm>
-      </p:grpSpPr>
-      <p:sp>
-        <p:nvSpPr>
-          <p:cNvPr id="2" name="標題 1"/>
-          <p:cNvSpPr>
-            <a:spLocks noGrp="1"/>
-          </p:cNvSpPr>
-          <p:nvPr>
-            <p:ph type="title"/>
-          </p:nvPr>
-        </p:nvSpPr>
-        <p:spPr>
-          <a:xfrm>
-            <a:off x="838200" y="106508"/>
-            <a:ext cx="10515600" cy="789420"/>
-          </a:xfrm>
-        </p:spPr>
-        <p:txBody>
-          <a:bodyPr/>
-          <a:lstStyle/>
-          <a:p>
-            <a:pPr algn="ctr"/>
-            <a:r>
-              <a:rPr lang="zh-TW" altLang="en-US" dirty="0" smtClean="0">
-                <a:solidFill>
-                  <a:srgbClr val="FF0000"/>
-                </a:solidFill>
-                <a:latin typeface="標楷體" panose="03000509000000000000" pitchFamily="65" charset="-120"/>
-                <a:ea typeface="標楷體" panose="03000509000000000000" pitchFamily="65" charset="-120"/>
-              </a:rPr>
-              <a:t>課程訊息發布</a:t>
-            </a:r>
-            <a:endParaRPr lang="zh-TW" altLang="en-US" dirty="0">
-              <a:solidFill>
-                <a:srgbClr val="FF0000"/>
-              </a:solidFill>
-              <a:latin typeface="標楷體" panose="03000509000000000000" pitchFamily="65" charset="-120"/>
-              <a:ea typeface="標楷體" panose="03000509000000000000" pitchFamily="65" charset="-120"/>
-            </a:endParaRPr>
-          </a:p>
-        </p:txBody>
-      </p:sp>
-      <p:sp>
-        <p:nvSpPr>
-          <p:cNvPr id="3" name="內容版面配置區 2"/>
-          <p:cNvSpPr>
-            <a:spLocks noGrp="1"/>
-          </p:cNvSpPr>
-          <p:nvPr>
-            <p:ph idx="1"/>
-          </p:nvPr>
-        </p:nvSpPr>
-        <p:spPr>
-          <a:xfrm>
-            <a:off x="690418" y="966644"/>
-            <a:ext cx="10515600" cy="2857211"/>
-          </a:xfrm>
-        </p:spPr>
-        <p:txBody>
-          <a:bodyPr/>
-          <a:lstStyle/>
-          <a:p>
-            <a:r>
-              <a:rPr lang="en-US" altLang="zh-TW" dirty="0" smtClean="0">
-                <a:solidFill>
-                  <a:srgbClr val="0000FF"/>
-                </a:solidFill>
-                <a:latin typeface="標楷體" panose="03000509000000000000" pitchFamily="65" charset="-120"/>
-                <a:ea typeface="標楷體" panose="03000509000000000000" pitchFamily="65" charset="-120"/>
-              </a:rPr>
-              <a:t>LINE</a:t>
-            </a:r>
-            <a:r>
-              <a:rPr lang="zh-TW" altLang="en-US" dirty="0">
-                <a:solidFill>
-                  <a:srgbClr val="0000FF"/>
-                </a:solidFill>
-                <a:latin typeface="標楷體" panose="03000509000000000000" pitchFamily="65" charset="-120"/>
-                <a:ea typeface="標楷體" panose="03000509000000000000" pitchFamily="65" charset="-120"/>
-              </a:rPr>
-              <a:t>群組名為</a:t>
-            </a:r>
-            <a:r>
-              <a:rPr lang="en-US" altLang="zh-TW" dirty="0">
-                <a:solidFill>
-                  <a:srgbClr val="0000FF"/>
-                </a:solidFill>
-                <a:latin typeface="標楷體" panose="03000509000000000000" pitchFamily="65" charset="-120"/>
-                <a:ea typeface="標楷體" panose="03000509000000000000" pitchFamily="65" charset="-120"/>
-              </a:rPr>
-              <a:t>: 113</a:t>
-            </a:r>
-            <a:r>
-              <a:rPr lang="zh-TW" altLang="en-US" dirty="0" smtClean="0">
-                <a:solidFill>
-                  <a:srgbClr val="0000FF"/>
-                </a:solidFill>
-                <a:latin typeface="標楷體" panose="03000509000000000000" pitchFamily="65" charset="-120"/>
-                <a:ea typeface="標楷體" panose="03000509000000000000" pitchFamily="65" charset="-120"/>
-              </a:rPr>
-              <a:t>資料探勘</a:t>
-            </a:r>
-            <a:endParaRPr lang="en-US" altLang="zh-TW" dirty="0" smtClean="0">
-              <a:solidFill>
-                <a:srgbClr val="0000FF"/>
-              </a:solidFill>
-              <a:latin typeface="標楷體" panose="03000509000000000000" pitchFamily="65" charset="-120"/>
-              <a:ea typeface="標楷體" panose="03000509000000000000" pitchFamily="65" charset="-120"/>
-            </a:endParaRPr>
-          </a:p>
-          <a:p>
-            <a:r>
-              <a:rPr lang="zh-TW" altLang="en-US" dirty="0" smtClean="0">
-                <a:solidFill>
-                  <a:srgbClr val="0000FF"/>
-                </a:solidFill>
-                <a:latin typeface="標楷體" panose="03000509000000000000" pitchFamily="65" charset="-120"/>
-                <a:ea typeface="標楷體" panose="03000509000000000000" pitchFamily="65" charset="-120"/>
-              </a:rPr>
-              <a:t>課程問題找不到老師的可以先找小老師洽詢</a:t>
-            </a:r>
-            <a:endParaRPr lang="en-US" altLang="zh-TW" dirty="0" smtClean="0">
-              <a:solidFill>
-                <a:srgbClr val="0000FF"/>
-              </a:solidFill>
-              <a:latin typeface="標楷體" panose="03000509000000000000" pitchFamily="65" charset="-120"/>
-              <a:ea typeface="標楷體" panose="03000509000000000000" pitchFamily="65" charset="-120"/>
-            </a:endParaRPr>
-          </a:p>
-          <a:p>
-            <a:r>
-              <a:rPr lang="zh-TW" altLang="en-US" dirty="0" smtClean="0">
-                <a:solidFill>
-                  <a:srgbClr val="0000FF"/>
-                </a:solidFill>
-                <a:latin typeface="標楷體" panose="03000509000000000000" pitchFamily="65" charset="-120"/>
-                <a:ea typeface="標楷體" panose="03000509000000000000" pitchFamily="65" charset="-120"/>
-              </a:rPr>
-              <a:t>使用課本</a:t>
-            </a:r>
-            <a:endParaRPr lang="en-US" altLang="zh-TW" dirty="0" smtClean="0">
-              <a:solidFill>
-                <a:srgbClr val="0000FF"/>
-              </a:solidFill>
-              <a:latin typeface="標楷體" panose="03000509000000000000" pitchFamily="65" charset="-120"/>
-              <a:ea typeface="標楷體" panose="03000509000000000000" pitchFamily="65" charset="-120"/>
-            </a:endParaRPr>
-          </a:p>
-          <a:p>
-            <a:r>
-              <a:rPr lang="zh-TW" altLang="en-US" dirty="0" smtClean="0">
-                <a:solidFill>
-                  <a:srgbClr val="0000FF"/>
-                </a:solidFill>
-                <a:latin typeface="標楷體" panose="03000509000000000000" pitchFamily="65" charset="-120"/>
-                <a:ea typeface="標楷體" panose="03000509000000000000" pitchFamily="65" charset="-120"/>
-              </a:rPr>
-              <a:t>上課內容雲端連接</a:t>
-            </a:r>
-            <a:r>
-              <a:rPr lang="en-US" altLang="zh-TW" dirty="0" smtClean="0">
-                <a:solidFill>
-                  <a:srgbClr val="0000FF"/>
-                </a:solidFill>
-                <a:latin typeface="標楷體" panose="03000509000000000000" pitchFamily="65" charset="-120"/>
-                <a:ea typeface="標楷體" panose="03000509000000000000" pitchFamily="65" charset="-120"/>
-              </a:rPr>
-              <a:t>:</a:t>
-            </a:r>
-          </a:p>
-          <a:p>
-            <a:pPr lvl="1"/>
-            <a:r>
-              <a:rPr lang="en-US" altLang="zh-TW" dirty="0"/>
-              <a:t>https://drive.google.com/drive/folders/1eA5mo6DxQPKpCUpq7ZbQLL9Yl6qkJ1wu?usp=sharing</a:t>
-            </a:r>
-            <a:endParaRPr lang="zh-TW" altLang="en-US" dirty="0"/>
-          </a:p>
-        </p:txBody>
-      </p:sp>
-      <p:pic>
-        <p:nvPicPr>
-          <p:cNvPr id="6" name="圖片 5"/>
-          <p:cNvPicPr>
-            <a:picLocks noChangeAspect="1"/>
-          </p:cNvPicPr>
-          <p:nvPr/>
-        </p:nvPicPr>
-        <p:blipFill>
-          <a:blip r:embed="rId2"/>
-          <a:stretch>
-            <a:fillRect/>
-          </a:stretch>
-        </p:blipFill>
-        <p:spPr>
-          <a:xfrm>
-            <a:off x="4815437" y="3357171"/>
-            <a:ext cx="2498563" cy="3386402"/>
-          </a:xfrm>
-          <a:prstGeom prst="rect">
-            <a:avLst/>
-          </a:prstGeom>
-        </p:spPr>
-      </p:pic>
-      <p:pic>
-        <p:nvPicPr>
-          <p:cNvPr id="7" name="圖片 6"/>
-          <p:cNvPicPr>
-            <a:picLocks noChangeAspect="1"/>
-          </p:cNvPicPr>
-          <p:nvPr/>
-        </p:nvPicPr>
-        <p:blipFill>
-          <a:blip r:embed="rId3"/>
-          <a:stretch>
-            <a:fillRect/>
-          </a:stretch>
-        </p:blipFill>
-        <p:spPr>
-          <a:xfrm>
-            <a:off x="7795490" y="3357171"/>
-            <a:ext cx="1993793" cy="3390195"/>
-          </a:xfrm>
-          <a:prstGeom prst="rect">
-            <a:avLst/>
-          </a:prstGeom>
-        </p:spPr>
-      </p:pic>
-    </p:spTree>
-    <p:extLst>
-      <p:ext uri="{BB962C8B-B14F-4D97-AF65-F5344CB8AC3E}">
-        <p14:creationId xmlns:p14="http://schemas.microsoft.com/office/powerpoint/2010/main" val="347606592"/>
-      </p:ext>
-    </p:extLst>
-  </p:cSld>
-  <p:clrMapOvr>
-    <a:masterClrMapping/>
-  </p:clrMapOvr>
-</p:sld>
-</file>
-
 <file path=ppt/theme/theme1.xml><?xml version="1.0" encoding="utf-8"?>
 <a:theme xmlns:a="http://schemas.openxmlformats.org/drawingml/2006/main" name="Office 佈景主題">
   <a:themeElements>

--- a/第一週_1.課堂規定及評量標準.pptx
+++ b/第一週_1.課堂規定及評量標準.pptx
@@ -205,7 +205,7 @@
           <a:p>
             <a:fld id="{31A8676C-D457-4A0B-9C91-83939419494E}" type="datetimeFigureOut">
               <a:rPr lang="zh-TW" altLang="en-US" smtClean="0"/>
-              <a:t>2025/9/9</a:t>
+              <a:t>2025/12/24</a:t>
             </a:fld>
             <a:endParaRPr lang="zh-TW" altLang="en-US"/>
           </a:p>
@@ -693,7 +693,7 @@
           <a:p>
             <a:fld id="{6930F9A4-4469-4216-8732-74830AAB3356}" type="datetimeFigureOut">
               <a:rPr lang="zh-TW" altLang="en-US" smtClean="0"/>
-              <a:t>2025/9/9</a:t>
+              <a:t>2025/12/24</a:t>
             </a:fld>
             <a:endParaRPr lang="zh-TW" altLang="en-US"/>
           </a:p>
@@ -863,7 +863,7 @@
           <a:p>
             <a:fld id="{6930F9A4-4469-4216-8732-74830AAB3356}" type="datetimeFigureOut">
               <a:rPr lang="zh-TW" altLang="en-US" smtClean="0"/>
-              <a:t>2025/9/9</a:t>
+              <a:t>2025/12/24</a:t>
             </a:fld>
             <a:endParaRPr lang="zh-TW" altLang="en-US"/>
           </a:p>
@@ -1043,7 +1043,7 @@
           <a:p>
             <a:fld id="{6930F9A4-4469-4216-8732-74830AAB3356}" type="datetimeFigureOut">
               <a:rPr lang="zh-TW" altLang="en-US" smtClean="0"/>
-              <a:t>2025/9/9</a:t>
+              <a:t>2025/12/24</a:t>
             </a:fld>
             <a:endParaRPr lang="zh-TW" altLang="en-US"/>
           </a:p>
@@ -1213,7 +1213,7 @@
           <a:p>
             <a:fld id="{6930F9A4-4469-4216-8732-74830AAB3356}" type="datetimeFigureOut">
               <a:rPr lang="zh-TW" altLang="en-US" smtClean="0"/>
-              <a:t>2025/9/9</a:t>
+              <a:t>2025/12/24</a:t>
             </a:fld>
             <a:endParaRPr lang="zh-TW" altLang="en-US"/>
           </a:p>
@@ -1459,7 +1459,7 @@
           <a:p>
             <a:fld id="{6930F9A4-4469-4216-8732-74830AAB3356}" type="datetimeFigureOut">
               <a:rPr lang="zh-TW" altLang="en-US" smtClean="0"/>
-              <a:t>2025/9/9</a:t>
+              <a:t>2025/12/24</a:t>
             </a:fld>
             <a:endParaRPr lang="zh-TW" altLang="en-US"/>
           </a:p>
@@ -1691,7 +1691,7 @@
           <a:p>
             <a:fld id="{6930F9A4-4469-4216-8732-74830AAB3356}" type="datetimeFigureOut">
               <a:rPr lang="zh-TW" altLang="en-US" smtClean="0"/>
-              <a:t>2025/9/9</a:t>
+              <a:t>2025/12/24</a:t>
             </a:fld>
             <a:endParaRPr lang="zh-TW" altLang="en-US"/>
           </a:p>
@@ -2058,7 +2058,7 @@
           <a:p>
             <a:fld id="{6930F9A4-4469-4216-8732-74830AAB3356}" type="datetimeFigureOut">
               <a:rPr lang="zh-TW" altLang="en-US" smtClean="0"/>
-              <a:t>2025/9/9</a:t>
+              <a:t>2025/12/24</a:t>
             </a:fld>
             <a:endParaRPr lang="zh-TW" altLang="en-US"/>
           </a:p>
@@ -2176,7 +2176,7 @@
           <a:p>
             <a:fld id="{6930F9A4-4469-4216-8732-74830AAB3356}" type="datetimeFigureOut">
               <a:rPr lang="zh-TW" altLang="en-US" smtClean="0"/>
-              <a:t>2025/9/9</a:t>
+              <a:t>2025/12/24</a:t>
             </a:fld>
             <a:endParaRPr lang="zh-TW" altLang="en-US"/>
           </a:p>
@@ -2271,7 +2271,7 @@
           <a:p>
             <a:fld id="{6930F9A4-4469-4216-8732-74830AAB3356}" type="datetimeFigureOut">
               <a:rPr lang="zh-TW" altLang="en-US" smtClean="0"/>
-              <a:t>2025/9/9</a:t>
+              <a:t>2025/12/24</a:t>
             </a:fld>
             <a:endParaRPr lang="zh-TW" altLang="en-US"/>
           </a:p>
@@ -2548,7 +2548,7 @@
           <a:p>
             <a:fld id="{6930F9A4-4469-4216-8732-74830AAB3356}" type="datetimeFigureOut">
               <a:rPr lang="zh-TW" altLang="en-US" smtClean="0"/>
-              <a:t>2025/9/9</a:t>
+              <a:t>2025/12/24</a:t>
             </a:fld>
             <a:endParaRPr lang="zh-TW" altLang="en-US"/>
           </a:p>
@@ -2801,7 +2801,7 @@
           <a:p>
             <a:fld id="{6930F9A4-4469-4216-8732-74830AAB3356}" type="datetimeFigureOut">
               <a:rPr lang="zh-TW" altLang="en-US" smtClean="0"/>
-              <a:t>2025/9/9</a:t>
+              <a:t>2025/12/24</a:t>
             </a:fld>
             <a:endParaRPr lang="zh-TW" altLang="en-US"/>
           </a:p>
@@ -3014,7 +3014,7 @@
           <a:p>
             <a:fld id="{6930F9A4-4469-4216-8732-74830AAB3356}" type="datetimeFigureOut">
               <a:rPr lang="zh-TW" altLang="en-US" smtClean="0"/>
-              <a:t>2025/9/9</a:t>
+              <a:t>2025/12/24</a:t>
             </a:fld>
             <a:endParaRPr lang="zh-TW" altLang="en-US"/>
           </a:p>
@@ -8405,35 +8405,35 @@
           <a:p>
             <a:pPr algn="ctr"/>
             <a:r>
-              <a:rPr lang="zh-TW" altLang="en-US" sz="2000" dirty="0">
+              <a:rPr lang="zh-TW" altLang="en-US" sz="2000" strike="dblStrike" dirty="0">
                 <a:latin typeface="標楷體" panose="03000509000000000000" pitchFamily="65" charset="-120"/>
                 <a:ea typeface="標楷體" panose="03000509000000000000" pitchFamily="65" charset="-120"/>
               </a:rPr>
               <a:t>報告後</a:t>
             </a:r>
             <a:r>
-              <a:rPr lang="en-US" altLang="zh-TW" sz="2000" dirty="0">
+              <a:rPr lang="en-US" altLang="zh-TW" sz="2000" strike="dblStrike" dirty="0">
                 <a:latin typeface="標楷體" panose="03000509000000000000" pitchFamily="65" charset="-120"/>
                 <a:ea typeface="標楷體" panose="03000509000000000000" pitchFamily="65" charset="-120"/>
               </a:rPr>
               <a:t>, </a:t>
             </a:r>
             <a:r>
-              <a:rPr lang="zh-TW" altLang="en-US" sz="2000" dirty="0">
+              <a:rPr lang="zh-TW" altLang="en-US" sz="2000" strike="dblStrike" dirty="0">
                 <a:latin typeface="標楷體" panose="03000509000000000000" pitchFamily="65" charset="-120"/>
                 <a:ea typeface="標楷體" panose="03000509000000000000" pitchFamily="65" charset="-120"/>
               </a:rPr>
               <a:t>將你的</a:t>
             </a:r>
             <a:r>
-              <a:rPr lang="en-US" altLang="zh-TW" sz="2000" dirty="0">
+              <a:rPr lang="en-US" altLang="zh-TW" sz="2000" strike="dblStrike" dirty="0">
                 <a:latin typeface="標楷體" panose="03000509000000000000" pitchFamily="65" charset="-120"/>
                 <a:ea typeface="標楷體" panose="03000509000000000000" pitchFamily="65" charset="-120"/>
               </a:rPr>
               <a:t>PPT LINE</a:t>
             </a:r>
             <a:r>
-              <a:rPr lang="zh-TW" altLang="en-US" sz="2000" dirty="0">
+              <a:rPr lang="zh-TW" altLang="en-US" sz="2000" strike="dblStrike" dirty="0">
                 <a:latin typeface="標楷體" panose="03000509000000000000" pitchFamily="65" charset="-120"/>
                 <a:ea typeface="標楷體" panose="03000509000000000000" pitchFamily="65" charset="-120"/>
               </a:rPr>
